--- a/public/lessons/year-6-maths/spring/week-17/use-one-per-cent/teaching-powerpoint-v1.pptx
+++ b/public/lessons/year-6-maths/spring/week-17/use-one-per-cent/teaching-powerpoint-v1.pptx
@@ -2,24 +2,24 @@
 <file path=ppt/presentation.xml><?xml version="1.0" encoding="utf-8"?>
 <p:presentation xmlns:p="http://schemas.openxmlformats.org/presentationml/2006/main">
   <p:sldMasterIdLst>
-    <p:sldMasterId xmlns:r="http://schemas.openxmlformats.org/officeDocument/2006/relationships" id="2147483648" r:id="R481f5a647b6b414f"/>
+    <p:sldMasterId xmlns:r="http://schemas.openxmlformats.org/officeDocument/2006/relationships" id="2147483648" r:id="Rffb6ec2963c04258"/>
   </p:sldMasterIdLst>
   <p:notesMasterIdLst>
-    <p:notesMasterId xmlns:r="http://schemas.openxmlformats.org/officeDocument/2006/relationships" r:id="R061e1516c1104fe3"/>
+    <p:notesMasterId xmlns:r="http://schemas.openxmlformats.org/officeDocument/2006/relationships" r:id="Rcbcfde1bc0ef4fc9"/>
   </p:notesMasterIdLst>
   <p:sldIdLst>
-    <p:sldId xmlns:r="http://schemas.openxmlformats.org/officeDocument/2006/relationships" id="256" r:id="Reb1afe7515af44bd"/>
-    <p:sldId xmlns:r="http://schemas.openxmlformats.org/officeDocument/2006/relationships" id="257" r:id="Re93c520ac88d43b0"/>
-    <p:sldId xmlns:r="http://schemas.openxmlformats.org/officeDocument/2006/relationships" id="258" r:id="R747551e8b2e44ea7"/>
-    <p:sldId xmlns:r="http://schemas.openxmlformats.org/officeDocument/2006/relationships" id="259" r:id="R920ac9149a384b91"/>
-    <p:sldId xmlns:r="http://schemas.openxmlformats.org/officeDocument/2006/relationships" id="260" r:id="Rfd3de8f80d2c462e"/>
-    <p:sldId xmlns:r="http://schemas.openxmlformats.org/officeDocument/2006/relationships" id="261" r:id="R6ee03f8febd74349"/>
-    <p:sldId xmlns:r="http://schemas.openxmlformats.org/officeDocument/2006/relationships" id="262" r:id="Rce2e1cc4d17c4d2f"/>
-    <p:sldId xmlns:r="http://schemas.openxmlformats.org/officeDocument/2006/relationships" id="263" r:id="Reae8526132654a3a"/>
-    <p:sldId xmlns:r="http://schemas.openxmlformats.org/officeDocument/2006/relationships" id="264" r:id="R9938615d43254189"/>
-    <p:sldId xmlns:r="http://schemas.openxmlformats.org/officeDocument/2006/relationships" id="265" r:id="R829ee6e0e7ee410c"/>
-    <p:sldId xmlns:r="http://schemas.openxmlformats.org/officeDocument/2006/relationships" id="266" r:id="R3dc7835f098f406e"/>
-    <p:sldId xmlns:r="http://schemas.openxmlformats.org/officeDocument/2006/relationships" id="267" r:id="R62b8bbc908a84bb7"/>
+    <p:sldId xmlns:r="http://schemas.openxmlformats.org/officeDocument/2006/relationships" id="256" r:id="Rfa222c28bcf4438a"/>
+    <p:sldId xmlns:r="http://schemas.openxmlformats.org/officeDocument/2006/relationships" id="257" r:id="Rfc3e72345e1c4033"/>
+    <p:sldId xmlns:r="http://schemas.openxmlformats.org/officeDocument/2006/relationships" id="258" r:id="R62df83ddf7b24c06"/>
+    <p:sldId xmlns:r="http://schemas.openxmlformats.org/officeDocument/2006/relationships" id="259" r:id="R875f281afd6d4ff1"/>
+    <p:sldId xmlns:r="http://schemas.openxmlformats.org/officeDocument/2006/relationships" id="260" r:id="Rb93d9e168d5648fb"/>
+    <p:sldId xmlns:r="http://schemas.openxmlformats.org/officeDocument/2006/relationships" id="261" r:id="R6be3c205bd664f6f"/>
+    <p:sldId xmlns:r="http://schemas.openxmlformats.org/officeDocument/2006/relationships" id="262" r:id="Rb73a39c894fc41e4"/>
+    <p:sldId xmlns:r="http://schemas.openxmlformats.org/officeDocument/2006/relationships" id="263" r:id="R91275a7c98a947c7"/>
+    <p:sldId xmlns:r="http://schemas.openxmlformats.org/officeDocument/2006/relationships" id="264" r:id="R792991792e2847f4"/>
+    <p:sldId xmlns:r="http://schemas.openxmlformats.org/officeDocument/2006/relationships" id="265" r:id="R445df821d12f4f7a"/>
+    <p:sldId xmlns:r="http://schemas.openxmlformats.org/officeDocument/2006/relationships" id="266" r:id="R0ed5693b595f49db"/>
+    <p:sldId xmlns:r="http://schemas.openxmlformats.org/officeDocument/2006/relationships" id="267" r:id="R7707354bce724493"/>
   </p:sldIdLst>
   <p:sldSz cx="12192000" cy="6858000"/>
   <p:notesSz cx="6858000" cy="9144000"/>
@@ -873,7 +873,7 @@
           <a:lstStyle xmlns:a="http://schemas.openxmlformats.org/drawingml/2006/main"/>
           <a:p xmlns:a="http://schemas.openxmlformats.org/drawingml/2006/main">
             <a:r>
-              <a:t>I do. Reveal the question, setup and each calculation stage one click at a time. Pupils watch before copying. Model answer: 110.5.</a:t>
+              <a:t>I do. Reveal the question, then reveal each mathematical change one click at a time. Point to the numbers and operation that changed before moving to the next line. Final answer: 110.5.</a:t>
             </a:r>
           </a:p>
         </p:txBody>
@@ -1291,7 +1291,7 @@
   </p:cSld>
   <p:clrMap bg1="lt1" tx1="dk1" bg2="lt2" tx2="dk2" accent1="accent1" accent2="accent2" accent3="accent3" accent4="accent4" accent5="accent5" accent6="accent6" hlink="hlink" folHlink="folHlink"/>
   <p:sldLayoutIdLst>
-    <p:sldLayoutId xmlns:r="http://schemas.openxmlformats.org/officeDocument/2006/relationships" id="2147483649" r:id="R161f4131dad844ba"/>
+    <p:sldLayoutId xmlns:r="http://schemas.openxmlformats.org/officeDocument/2006/relationships" id="2147483649" r:id="R9b9941daf9444e69"/>
   </p:sldLayoutIdLst>
   <p:txStyles>
     <p:titleStyle>
@@ -1842,7 +1842,7 @@
           <p:cNvPr id="12" name="">
             <a:extLst xmlns:a="http://schemas.openxmlformats.org/drawingml/2006/main">
               <a:ext uri="{FF2B5EF4-FFF2-40B4-BE49-F238E27FC236}">
-                <a16:creationId xmlns:a16="http://schemas.microsoft.com/office/drawing/2014/main" id="{70CDA4EA-89ED-4B94-A5D5-C56929F2635B}"/>
+                <a16:creationId xmlns:a16="http://schemas.microsoft.com/office/drawing/2014/main" id="{F060BB71-F72D-4BDF-BF9A-7EF6AB604B90}"/>
               </a:ext>
             </a:extLst>
           </p:cNvPr>
@@ -1874,7 +1874,7 @@
           <p:cNvPr id="2" name="">
             <a:extLst xmlns:a="http://schemas.openxmlformats.org/drawingml/2006/main">
               <a:ext uri="{FF2B5EF4-FFF2-40B4-BE49-F238E27FC236}">
-                <a16:creationId xmlns:a16="http://schemas.microsoft.com/office/drawing/2014/main" id="{407A5CDB-D9E4-48FB-B066-EFB8D11AFB17}"/>
+                <a16:creationId xmlns:a16="http://schemas.microsoft.com/office/drawing/2014/main" id="{62136E06-200B-4655-8DAA-952EAE3CF0DD}"/>
               </a:ext>
             </a:extLst>
           </p:cNvPr>
@@ -1931,7 +1931,7 @@
           <p:cNvPr id="3" name="">
             <a:extLst xmlns:a="http://schemas.openxmlformats.org/drawingml/2006/main">
               <a:ext uri="{FF2B5EF4-FFF2-40B4-BE49-F238E27FC236}">
-                <a16:creationId xmlns:a16="http://schemas.microsoft.com/office/drawing/2014/main" id="{E058868A-309A-47B5-82DA-0CE86CE8A6B5}"/>
+                <a16:creationId xmlns:a16="http://schemas.microsoft.com/office/drawing/2014/main" id="{EE43CB1E-8CC1-44B2-8EE9-44AF98151408}"/>
               </a:ext>
             </a:extLst>
           </p:cNvPr>
@@ -1965,7 +1965,7 @@
           <p:cNvPr id="4" name="">
             <a:extLst xmlns:a="http://schemas.openxmlformats.org/drawingml/2006/main">
               <a:ext uri="{FF2B5EF4-FFF2-40B4-BE49-F238E27FC236}">
-                <a16:creationId xmlns:a16="http://schemas.microsoft.com/office/drawing/2014/main" id="{9E1B76D0-C30B-4CD4-A775-0D1C33CBBDFB}"/>
+                <a16:creationId xmlns:a16="http://schemas.microsoft.com/office/drawing/2014/main" id="{3001D203-DE1E-4B4C-ACA8-9A3F36178B57}"/>
               </a:ext>
             </a:extLst>
           </p:cNvPr>
@@ -2022,7 +2022,7 @@
           <p:cNvPr id="5" name="">
             <a:extLst xmlns:a="http://schemas.openxmlformats.org/drawingml/2006/main">
               <a:ext uri="{FF2B5EF4-FFF2-40B4-BE49-F238E27FC236}">
-                <a16:creationId xmlns:a16="http://schemas.microsoft.com/office/drawing/2014/main" id="{2CCA7F24-157E-420C-884B-896DD6574309}"/>
+                <a16:creationId xmlns:a16="http://schemas.microsoft.com/office/drawing/2014/main" id="{D1AF69BB-FC75-4E95-B121-92C995092972}"/>
               </a:ext>
             </a:extLst>
           </p:cNvPr>
@@ -2079,7 +2079,7 @@
           <p:cNvPr id="6" name="">
             <a:extLst xmlns:a="http://schemas.openxmlformats.org/drawingml/2006/main">
               <a:ext uri="{FF2B5EF4-FFF2-40B4-BE49-F238E27FC236}">
-                <a16:creationId xmlns:a16="http://schemas.microsoft.com/office/drawing/2014/main" id="{D81A7080-DBEB-4F7D-99BD-BDEB27FD1232}"/>
+                <a16:creationId xmlns:a16="http://schemas.microsoft.com/office/drawing/2014/main" id="{DD3C1F57-6B39-4B0F-9A5F-BC4C7F41C2C2}"/>
               </a:ext>
             </a:extLst>
           </p:cNvPr>
@@ -2113,7 +2113,7 @@
           <p:cNvPr id="7" name="">
             <a:extLst xmlns:a="http://schemas.openxmlformats.org/drawingml/2006/main">
               <a:ext uri="{FF2B5EF4-FFF2-40B4-BE49-F238E27FC236}">
-                <a16:creationId xmlns:a16="http://schemas.microsoft.com/office/drawing/2014/main" id="{F84267DC-392E-44AA-9642-50787CA637CA}"/>
+                <a16:creationId xmlns:a16="http://schemas.microsoft.com/office/drawing/2014/main" id="{A700E525-F66C-4116-A4F8-638361D9FF6D}"/>
               </a:ext>
             </a:extLst>
           </p:cNvPr>
@@ -2170,7 +2170,7 @@
           <p:cNvPr id="8" name="">
             <a:extLst xmlns:a="http://schemas.openxmlformats.org/drawingml/2006/main">
               <a:ext uri="{FF2B5EF4-FFF2-40B4-BE49-F238E27FC236}">
-                <a16:creationId xmlns:a16="http://schemas.microsoft.com/office/drawing/2014/main" id="{3C1B4B0F-C37B-4A39-8002-59CF04247E49}"/>
+                <a16:creationId xmlns:a16="http://schemas.microsoft.com/office/drawing/2014/main" id="{3083B935-CC93-44B9-B930-8752A08EBF3F}"/>
               </a:ext>
             </a:extLst>
           </p:cNvPr>
@@ -2227,7 +2227,7 @@
           <p:cNvPr id="9" name="">
             <a:extLst xmlns:a="http://schemas.openxmlformats.org/drawingml/2006/main">
               <a:ext uri="{FF2B5EF4-FFF2-40B4-BE49-F238E27FC236}">
-                <a16:creationId xmlns:a16="http://schemas.microsoft.com/office/drawing/2014/main" id="{5C4C3FA7-9D4E-475F-8AAA-AD9CF27F10CB}"/>
+                <a16:creationId xmlns:a16="http://schemas.microsoft.com/office/drawing/2014/main" id="{6B85D0CD-6C85-4028-96E4-A8B01E5399CD}"/>
               </a:ext>
             </a:extLst>
           </p:cNvPr>
@@ -2284,7 +2284,7 @@
           <p:cNvPr id="10" name="">
             <a:extLst xmlns:a="http://schemas.openxmlformats.org/drawingml/2006/main">
               <a:ext uri="{FF2B5EF4-FFF2-40B4-BE49-F238E27FC236}">
-                <a16:creationId xmlns:a16="http://schemas.microsoft.com/office/drawing/2014/main" id="{137CB982-A620-4251-BAE2-0ACC1C43A0B3}"/>
+                <a16:creationId xmlns:a16="http://schemas.microsoft.com/office/drawing/2014/main" id="{43D75EDA-B9F1-4CC6-973D-CA9A79DDF48C}"/>
               </a:ext>
             </a:extLst>
           </p:cNvPr>
@@ -2341,7 +2341,7 @@
           <p:cNvPr id="11" name="">
             <a:extLst xmlns:a="http://schemas.openxmlformats.org/drawingml/2006/main">
               <a:ext uri="{FF2B5EF4-FFF2-40B4-BE49-F238E27FC236}">
-                <a16:creationId xmlns:a16="http://schemas.microsoft.com/office/drawing/2014/main" id="{FC81D0C9-3D46-4D6D-8678-429AD6340EF0}"/>
+                <a16:creationId xmlns:a16="http://schemas.microsoft.com/office/drawing/2014/main" id="{99429F3E-F2B9-413B-A4D8-D12F1E9BB692}"/>
               </a:ext>
             </a:extLst>
           </p:cNvPr>
@@ -2396,7 +2396,7 @@
     </p:spTree>
     <p:extLst>
       <p:ext uri="{BB962C8B-B14F-4D97-AF65-F5344CB8AC3E}">
-        <p14:creationId xmlns:p14="http://schemas.microsoft.com/office/powerpoint/2010/main" val="915709933"/>
+        <p14:creationId xmlns:p14="http://schemas.microsoft.com/office/powerpoint/2010/main" val="1064256668"/>
       </p:ext>
     </p:extLst>
   </p:cSld>
@@ -2427,7 +2427,7 @@
           <p:cNvPr id="14" name="">
             <a:extLst xmlns:a="http://schemas.openxmlformats.org/drawingml/2006/main">
               <a:ext uri="{FF2B5EF4-FFF2-40B4-BE49-F238E27FC236}">
-                <a16:creationId xmlns:a16="http://schemas.microsoft.com/office/drawing/2014/main" id="{608E62A0-E6E4-45BB-A513-EE51CBEC2CC1}"/>
+                <a16:creationId xmlns:a16="http://schemas.microsoft.com/office/drawing/2014/main" id="{374B916B-F1BB-490C-BCB3-E0D7ACEAF3DE}"/>
               </a:ext>
             </a:extLst>
           </p:cNvPr>
@@ -2459,7 +2459,7 @@
           <p:cNvPr id="2" name="">
             <a:extLst xmlns:a="http://schemas.openxmlformats.org/drawingml/2006/main">
               <a:ext uri="{FF2B5EF4-FFF2-40B4-BE49-F238E27FC236}">
-                <a16:creationId xmlns:a16="http://schemas.microsoft.com/office/drawing/2014/main" id="{7549F465-C9AC-4D1E-868E-8766D0DF2DE6}"/>
+                <a16:creationId xmlns:a16="http://schemas.microsoft.com/office/drawing/2014/main" id="{CA62CF86-13C2-4A3B-91BE-2BBC6DC746E8}"/>
               </a:ext>
             </a:extLst>
           </p:cNvPr>
@@ -2516,7 +2516,7 @@
           <p:cNvPr id="3" name="">
             <a:extLst xmlns:a="http://schemas.openxmlformats.org/drawingml/2006/main">
               <a:ext uri="{FF2B5EF4-FFF2-40B4-BE49-F238E27FC236}">
-                <a16:creationId xmlns:a16="http://schemas.microsoft.com/office/drawing/2014/main" id="{FC6FBE17-0754-43AD-A76B-06952060391A}"/>
+                <a16:creationId xmlns:a16="http://schemas.microsoft.com/office/drawing/2014/main" id="{E90F40C7-B808-47CF-B856-3D079E7EF81D}"/>
               </a:ext>
             </a:extLst>
           </p:cNvPr>
@@ -2548,7 +2548,7 @@
           <p:cNvPr id="4" name="">
             <a:extLst xmlns:a="http://schemas.openxmlformats.org/drawingml/2006/main">
               <a:ext uri="{FF2B5EF4-FFF2-40B4-BE49-F238E27FC236}">
-                <a16:creationId xmlns:a16="http://schemas.microsoft.com/office/drawing/2014/main" id="{C480B6D3-C811-4EC9-9006-386725B14CE2}"/>
+                <a16:creationId xmlns:a16="http://schemas.microsoft.com/office/drawing/2014/main" id="{940F3AE4-B301-4D6F-9C62-48BEA125520D}"/>
               </a:ext>
             </a:extLst>
           </p:cNvPr>
@@ -2605,7 +2605,7 @@
           <p:cNvPr id="5" name="">
             <a:extLst xmlns:a="http://schemas.openxmlformats.org/drawingml/2006/main">
               <a:ext uri="{FF2B5EF4-FFF2-40B4-BE49-F238E27FC236}">
-                <a16:creationId xmlns:a16="http://schemas.microsoft.com/office/drawing/2014/main" id="{29B3EF33-63DB-4308-97E1-477F691921BD}"/>
+                <a16:creationId xmlns:a16="http://schemas.microsoft.com/office/drawing/2014/main" id="{5AC38536-540B-4B8A-A994-175D446CC560}"/>
               </a:ext>
             </a:extLst>
           </p:cNvPr>
@@ -2662,7 +2662,7 @@
           <p:cNvPr id="6" name="">
             <a:extLst xmlns:a="http://schemas.openxmlformats.org/drawingml/2006/main">
               <a:ext uri="{FF2B5EF4-FFF2-40B4-BE49-F238E27FC236}">
-                <a16:creationId xmlns:a16="http://schemas.microsoft.com/office/drawing/2014/main" id="{61951D9B-3DA6-440F-B999-34F4E7EA8591}"/>
+                <a16:creationId xmlns:a16="http://schemas.microsoft.com/office/drawing/2014/main" id="{C291F4D7-E263-4DC1-BE0E-0D0F2F9B5338}"/>
               </a:ext>
             </a:extLst>
           </p:cNvPr>
@@ -2719,7 +2719,7 @@
           <p:cNvPr id="7" name="">
             <a:extLst xmlns:a="http://schemas.openxmlformats.org/drawingml/2006/main">
               <a:ext uri="{FF2B5EF4-FFF2-40B4-BE49-F238E27FC236}">
-                <a16:creationId xmlns:a16="http://schemas.microsoft.com/office/drawing/2014/main" id="{3BCAFAB6-8037-4442-BC31-D241AC0DAB10}"/>
+                <a16:creationId xmlns:a16="http://schemas.microsoft.com/office/drawing/2014/main" id="{0702097C-2D8F-4902-8839-50FB7665EF09}"/>
               </a:ext>
             </a:extLst>
           </p:cNvPr>
@@ -2751,7 +2751,7 @@
           <p:cNvPr id="8" name="">
             <a:extLst xmlns:a="http://schemas.openxmlformats.org/drawingml/2006/main">
               <a:ext uri="{FF2B5EF4-FFF2-40B4-BE49-F238E27FC236}">
-                <a16:creationId xmlns:a16="http://schemas.microsoft.com/office/drawing/2014/main" id="{58ACA7D9-9F6F-444D-820B-B6BC647C94F0}"/>
+                <a16:creationId xmlns:a16="http://schemas.microsoft.com/office/drawing/2014/main" id="{39FE6F9C-5C20-41AB-B955-00826CAA7FDE}"/>
               </a:ext>
             </a:extLst>
           </p:cNvPr>
@@ -2808,7 +2808,7 @@
           <p:cNvPr id="9" name="">
             <a:extLst xmlns:a="http://schemas.openxmlformats.org/drawingml/2006/main">
               <a:ext uri="{FF2B5EF4-FFF2-40B4-BE49-F238E27FC236}">
-                <a16:creationId xmlns:a16="http://schemas.microsoft.com/office/drawing/2014/main" id="{25FC8E6A-EE95-4F17-A23F-D54B27534AB6}"/>
+                <a16:creationId xmlns:a16="http://schemas.microsoft.com/office/drawing/2014/main" id="{C85A45E6-0A22-49F1-849F-B09EC7A30A6E}"/>
               </a:ext>
             </a:extLst>
           </p:cNvPr>
@@ -2865,7 +2865,7 @@
           <p:cNvPr id="10" name="">
             <a:extLst xmlns:a="http://schemas.openxmlformats.org/drawingml/2006/main">
               <a:ext uri="{FF2B5EF4-FFF2-40B4-BE49-F238E27FC236}">
-                <a16:creationId xmlns:a16="http://schemas.microsoft.com/office/drawing/2014/main" id="{D714D3E3-C732-4F34-9AA7-096E8E7ED2A2}"/>
+                <a16:creationId xmlns:a16="http://schemas.microsoft.com/office/drawing/2014/main" id="{C77F270C-FE8F-4D6A-A529-139B2D3BA36F}"/>
               </a:ext>
             </a:extLst>
           </p:cNvPr>
@@ -2922,7 +2922,7 @@
           <p:cNvPr id="11" name="">
             <a:extLst xmlns:a="http://schemas.openxmlformats.org/drawingml/2006/main">
               <a:ext uri="{FF2B5EF4-FFF2-40B4-BE49-F238E27FC236}">
-                <a16:creationId xmlns:a16="http://schemas.microsoft.com/office/drawing/2014/main" id="{9E96D9E7-A662-40B4-81DC-52D26532D71D}"/>
+                <a16:creationId xmlns:a16="http://schemas.microsoft.com/office/drawing/2014/main" id="{DCB69662-2C01-4355-9470-59B93FF5427D}"/>
               </a:ext>
             </a:extLst>
           </p:cNvPr>
@@ -2979,7 +2979,7 @@
           <p:cNvPr id="12" name="">
             <a:extLst xmlns:a="http://schemas.openxmlformats.org/drawingml/2006/main">
               <a:ext uri="{FF2B5EF4-FFF2-40B4-BE49-F238E27FC236}">
-                <a16:creationId xmlns:a16="http://schemas.microsoft.com/office/drawing/2014/main" id="{CA79E0B3-F344-4D5C-ABEF-002DACA03BA6}"/>
+                <a16:creationId xmlns:a16="http://schemas.microsoft.com/office/drawing/2014/main" id="{C683E691-A2AF-49A2-9963-5719D9DF7720}"/>
               </a:ext>
             </a:extLst>
           </p:cNvPr>
@@ -3036,7 +3036,7 @@
           <p:cNvPr id="13" name="">
             <a:extLst xmlns:a="http://schemas.openxmlformats.org/drawingml/2006/main">
               <a:ext uri="{FF2B5EF4-FFF2-40B4-BE49-F238E27FC236}">
-                <a16:creationId xmlns:a16="http://schemas.microsoft.com/office/drawing/2014/main" id="{45A42260-115B-42FE-B702-F30FA780A778}"/>
+                <a16:creationId xmlns:a16="http://schemas.microsoft.com/office/drawing/2014/main" id="{8413EC2D-9AF9-4178-9EF6-1502B60050FB}"/>
               </a:ext>
             </a:extLst>
           </p:cNvPr>
@@ -3091,7 +3091,7 @@
     </p:spTree>
     <p:extLst>
       <p:ext uri="{BB962C8B-B14F-4D97-AF65-F5344CB8AC3E}">
-        <p14:creationId xmlns:p14="http://schemas.microsoft.com/office/powerpoint/2010/main" val="2129219596"/>
+        <p14:creationId xmlns:p14="http://schemas.microsoft.com/office/powerpoint/2010/main" val="102689517"/>
       </p:ext>
     </p:extLst>
   </p:cSld>
@@ -3292,7 +3292,7 @@
           <p:cNvPr id="19" name="">
             <a:extLst xmlns:a="http://schemas.openxmlformats.org/drawingml/2006/main">
               <a:ext uri="{FF2B5EF4-FFF2-40B4-BE49-F238E27FC236}">
-                <a16:creationId xmlns:a16="http://schemas.microsoft.com/office/drawing/2014/main" id="{0E616E19-025E-44E6-8710-EBE8C5B0F0E9}"/>
+                <a16:creationId xmlns:a16="http://schemas.microsoft.com/office/drawing/2014/main" id="{B60390E8-6A8C-47F1-A494-A0C0EC9971B7}"/>
               </a:ext>
             </a:extLst>
           </p:cNvPr>
@@ -3324,7 +3324,7 @@
           <p:cNvPr id="2" name="">
             <a:extLst xmlns:a="http://schemas.openxmlformats.org/drawingml/2006/main">
               <a:ext uri="{FF2B5EF4-FFF2-40B4-BE49-F238E27FC236}">
-                <a16:creationId xmlns:a16="http://schemas.microsoft.com/office/drawing/2014/main" id="{DBD96F14-2C9F-486C-B254-5C008D7BECB3}"/>
+                <a16:creationId xmlns:a16="http://schemas.microsoft.com/office/drawing/2014/main" id="{8A32A535-EB2D-4DC8-9F42-CB9C743BFA8C}"/>
               </a:ext>
             </a:extLst>
           </p:cNvPr>
@@ -3381,7 +3381,7 @@
           <p:cNvPr id="3" name="">
             <a:extLst xmlns:a="http://schemas.openxmlformats.org/drawingml/2006/main">
               <a:ext uri="{FF2B5EF4-FFF2-40B4-BE49-F238E27FC236}">
-                <a16:creationId xmlns:a16="http://schemas.microsoft.com/office/drawing/2014/main" id="{CA5603D1-B37C-4B1A-9717-4FF2D7E3FF13}"/>
+                <a16:creationId xmlns:a16="http://schemas.microsoft.com/office/drawing/2014/main" id="{6E5E88E5-FEF3-46BD-BB36-50B0CC6A2759}"/>
               </a:ext>
             </a:extLst>
           </p:cNvPr>
@@ -3413,7 +3413,7 @@
           <p:cNvPr id="4" name="">
             <a:extLst xmlns:a="http://schemas.openxmlformats.org/drawingml/2006/main">
               <a:ext uri="{FF2B5EF4-FFF2-40B4-BE49-F238E27FC236}">
-                <a16:creationId xmlns:a16="http://schemas.microsoft.com/office/drawing/2014/main" id="{54BABC66-CF11-4441-8010-DC05FAB75454}"/>
+                <a16:creationId xmlns:a16="http://schemas.microsoft.com/office/drawing/2014/main" id="{CEA4A510-EFB7-4BB8-B90C-45C58B3D7C4F}"/>
               </a:ext>
             </a:extLst>
           </p:cNvPr>
@@ -3470,7 +3470,7 @@
           <p:cNvPr id="5" name="">
             <a:extLst xmlns:a="http://schemas.openxmlformats.org/drawingml/2006/main">
               <a:ext uri="{FF2B5EF4-FFF2-40B4-BE49-F238E27FC236}">
-                <a16:creationId xmlns:a16="http://schemas.microsoft.com/office/drawing/2014/main" id="{8EA16127-3833-4536-89CF-76BEC3A4AF92}"/>
+                <a16:creationId xmlns:a16="http://schemas.microsoft.com/office/drawing/2014/main" id="{D161158E-D51B-4561-B0BE-724D707C4483}"/>
               </a:ext>
             </a:extLst>
           </p:cNvPr>
@@ -3527,7 +3527,7 @@
           <p:cNvPr id="6" name="">
             <a:extLst xmlns:a="http://schemas.openxmlformats.org/drawingml/2006/main">
               <a:ext uri="{FF2B5EF4-FFF2-40B4-BE49-F238E27FC236}">
-                <a16:creationId xmlns:a16="http://schemas.microsoft.com/office/drawing/2014/main" id="{4C953C7A-4909-4ECB-828B-18022B5F7FA6}"/>
+                <a16:creationId xmlns:a16="http://schemas.microsoft.com/office/drawing/2014/main" id="{2DBBF323-A599-45CF-89D6-7520650A8F8C}"/>
               </a:ext>
             </a:extLst>
           </p:cNvPr>
@@ -3584,7 +3584,7 @@
           <p:cNvPr id="7" name="">
             <a:extLst xmlns:a="http://schemas.openxmlformats.org/drawingml/2006/main">
               <a:ext uri="{FF2B5EF4-FFF2-40B4-BE49-F238E27FC236}">
-                <a16:creationId xmlns:a16="http://schemas.microsoft.com/office/drawing/2014/main" id="{98E14A52-677E-42A7-868F-D85FCCF12FC3}"/>
+                <a16:creationId xmlns:a16="http://schemas.microsoft.com/office/drawing/2014/main" id="{5C58BE67-7CE4-450D-AB3E-95830958FF5A}"/>
               </a:ext>
             </a:extLst>
           </p:cNvPr>
@@ -3616,7 +3616,7 @@
           <p:cNvPr id="8" name="">
             <a:extLst xmlns:a="http://schemas.openxmlformats.org/drawingml/2006/main">
               <a:ext uri="{FF2B5EF4-FFF2-40B4-BE49-F238E27FC236}">
-                <a16:creationId xmlns:a16="http://schemas.microsoft.com/office/drawing/2014/main" id="{2E99D66C-9D22-4591-897D-1EA6CFF048AF}"/>
+                <a16:creationId xmlns:a16="http://schemas.microsoft.com/office/drawing/2014/main" id="{FFDBBA3B-6065-42FD-B261-80FEF8E6FDB8}"/>
               </a:ext>
             </a:extLst>
           </p:cNvPr>
@@ -3673,7 +3673,7 @@
           <p:cNvPr id="9" name="">
             <a:extLst xmlns:a="http://schemas.openxmlformats.org/drawingml/2006/main">
               <a:ext uri="{FF2B5EF4-FFF2-40B4-BE49-F238E27FC236}">
-                <a16:creationId xmlns:a16="http://schemas.microsoft.com/office/drawing/2014/main" id="{FD0A2AE5-7E39-432C-B095-396BB8C67B0A}"/>
+                <a16:creationId xmlns:a16="http://schemas.microsoft.com/office/drawing/2014/main" id="{57516197-9BB8-48AD-BAD2-1913BFAAC0BC}"/>
               </a:ext>
             </a:extLst>
           </p:cNvPr>
@@ -3730,7 +3730,7 @@
           <p:cNvPr id="10" name="">
             <a:extLst xmlns:a="http://schemas.openxmlformats.org/drawingml/2006/main">
               <a:ext uri="{FF2B5EF4-FFF2-40B4-BE49-F238E27FC236}">
-                <a16:creationId xmlns:a16="http://schemas.microsoft.com/office/drawing/2014/main" id="{2E325485-70A2-452B-933D-7285574920FB}"/>
+                <a16:creationId xmlns:a16="http://schemas.microsoft.com/office/drawing/2014/main" id="{0C766882-B711-4471-A5AF-B92DDD5CB237}"/>
               </a:ext>
             </a:extLst>
           </p:cNvPr>
@@ -3787,7 +3787,7 @@
           <p:cNvPr id="11" name="">
             <a:extLst xmlns:a="http://schemas.openxmlformats.org/drawingml/2006/main">
               <a:ext uri="{FF2B5EF4-FFF2-40B4-BE49-F238E27FC236}">
-                <a16:creationId xmlns:a16="http://schemas.microsoft.com/office/drawing/2014/main" id="{A6EBEE78-C309-4D31-B789-D86B1CF5A552}"/>
+                <a16:creationId xmlns:a16="http://schemas.microsoft.com/office/drawing/2014/main" id="{53E4D5D5-650B-4C04-9889-ED8DC414F330}"/>
               </a:ext>
             </a:extLst>
           </p:cNvPr>
@@ -3821,7 +3821,7 @@
           <p:cNvPr id="12" name="">
             <a:extLst xmlns:a="http://schemas.openxmlformats.org/drawingml/2006/main">
               <a:ext uri="{FF2B5EF4-FFF2-40B4-BE49-F238E27FC236}">
-                <a16:creationId xmlns:a16="http://schemas.microsoft.com/office/drawing/2014/main" id="{13D46E4C-6740-4646-9C6F-F68BDC79678E}"/>
+                <a16:creationId xmlns:a16="http://schemas.microsoft.com/office/drawing/2014/main" id="{41989016-A144-4A80-AB6A-FECA2034CBEF}"/>
               </a:ext>
             </a:extLst>
           </p:cNvPr>
@@ -3878,7 +3878,7 @@
           <p:cNvPr id="13" name="">
             <a:extLst xmlns:a="http://schemas.openxmlformats.org/drawingml/2006/main">
               <a:ext uri="{FF2B5EF4-FFF2-40B4-BE49-F238E27FC236}">
-                <a16:creationId xmlns:a16="http://schemas.microsoft.com/office/drawing/2014/main" id="{19033EA8-520C-43B3-AA75-BBB7829F02D2}"/>
+                <a16:creationId xmlns:a16="http://schemas.microsoft.com/office/drawing/2014/main" id="{DC9599D6-B508-4C6B-81A6-217EF2FBC070}"/>
               </a:ext>
             </a:extLst>
           </p:cNvPr>
@@ -3935,7 +3935,7 @@
           <p:cNvPr id="14" name="">
             <a:extLst xmlns:a="http://schemas.openxmlformats.org/drawingml/2006/main">
               <a:ext uri="{FF2B5EF4-FFF2-40B4-BE49-F238E27FC236}">
-                <a16:creationId xmlns:a16="http://schemas.microsoft.com/office/drawing/2014/main" id="{E56DB2C4-719C-4785-B302-59FC0B0B3780}"/>
+                <a16:creationId xmlns:a16="http://schemas.microsoft.com/office/drawing/2014/main" id="{CD190538-4ECF-45D3-BB11-1DD65D940031}"/>
               </a:ext>
             </a:extLst>
           </p:cNvPr>
@@ -3992,7 +3992,7 @@
           <p:cNvPr id="15" name="">
             <a:extLst xmlns:a="http://schemas.openxmlformats.org/drawingml/2006/main">
               <a:ext uri="{FF2B5EF4-FFF2-40B4-BE49-F238E27FC236}">
-                <a16:creationId xmlns:a16="http://schemas.microsoft.com/office/drawing/2014/main" id="{65DB4D0F-8D2F-458A-BE82-512915ABB2A8}"/>
+                <a16:creationId xmlns:a16="http://schemas.microsoft.com/office/drawing/2014/main" id="{7EC1A9D0-48E9-4B64-A890-B2D41148F802}"/>
               </a:ext>
             </a:extLst>
           </p:cNvPr>
@@ -4026,7 +4026,7 @@
           <p:cNvPr id="16" name="">
             <a:extLst xmlns:a="http://schemas.openxmlformats.org/drawingml/2006/main">
               <a:ext uri="{FF2B5EF4-FFF2-40B4-BE49-F238E27FC236}">
-                <a16:creationId xmlns:a16="http://schemas.microsoft.com/office/drawing/2014/main" id="{06F32D79-F406-45D2-B4B3-F36E6CBE5A9C}"/>
+                <a16:creationId xmlns:a16="http://schemas.microsoft.com/office/drawing/2014/main" id="{57C7A4D7-4926-4001-93B6-F520EE73FBF2}"/>
               </a:ext>
             </a:extLst>
           </p:cNvPr>
@@ -4083,7 +4083,7 @@
           <p:cNvPr id="17" name="">
             <a:extLst xmlns:a="http://schemas.openxmlformats.org/drawingml/2006/main">
               <a:ext uri="{FF2B5EF4-FFF2-40B4-BE49-F238E27FC236}">
-                <a16:creationId xmlns:a16="http://schemas.microsoft.com/office/drawing/2014/main" id="{43F58256-C0BB-4BB0-9062-2BB7BF24C7BA}"/>
+                <a16:creationId xmlns:a16="http://schemas.microsoft.com/office/drawing/2014/main" id="{CE9F1230-973B-4D1C-8AF7-E2985929EEC4}"/>
               </a:ext>
             </a:extLst>
           </p:cNvPr>
@@ -4140,7 +4140,7 @@
           <p:cNvPr id="18" name="">
             <a:extLst xmlns:a="http://schemas.openxmlformats.org/drawingml/2006/main">
               <a:ext uri="{FF2B5EF4-FFF2-40B4-BE49-F238E27FC236}">
-                <a16:creationId xmlns:a16="http://schemas.microsoft.com/office/drawing/2014/main" id="{F6D067F8-3E14-4BD9-A116-11EC39D11FF3}"/>
+                <a16:creationId xmlns:a16="http://schemas.microsoft.com/office/drawing/2014/main" id="{FAF36182-95A4-4F2F-A200-8519428BA460}"/>
               </a:ext>
             </a:extLst>
           </p:cNvPr>
@@ -4195,7 +4195,7 @@
     </p:spTree>
     <p:extLst>
       <p:ext uri="{BB962C8B-B14F-4D97-AF65-F5344CB8AC3E}">
-        <p14:creationId xmlns:p14="http://schemas.microsoft.com/office/powerpoint/2010/main" val="151490000"/>
+        <p14:creationId xmlns:p14="http://schemas.microsoft.com/office/powerpoint/2010/main" val="1007674132"/>
       </p:ext>
     </p:extLst>
   </p:cSld>
@@ -4350,7 +4350,7 @@
           <p:cNvPr id="23" name="">
             <a:extLst xmlns:a="http://schemas.openxmlformats.org/drawingml/2006/main">
               <a:ext uri="{FF2B5EF4-FFF2-40B4-BE49-F238E27FC236}">
-                <a16:creationId xmlns:a16="http://schemas.microsoft.com/office/drawing/2014/main" id="{5C5D7283-4E3D-4F9D-B01E-7444A4866DD6}"/>
+                <a16:creationId xmlns:a16="http://schemas.microsoft.com/office/drawing/2014/main" id="{327F49CD-EB63-4138-B376-F6BE72A65653}"/>
               </a:ext>
             </a:extLst>
           </p:cNvPr>
@@ -4382,7 +4382,7 @@
           <p:cNvPr id="2" name="">
             <a:extLst xmlns:a="http://schemas.openxmlformats.org/drawingml/2006/main">
               <a:ext uri="{FF2B5EF4-FFF2-40B4-BE49-F238E27FC236}">
-                <a16:creationId xmlns:a16="http://schemas.microsoft.com/office/drawing/2014/main" id="{10B801D6-AA37-4427-8218-1A5186A70BD7}"/>
+                <a16:creationId xmlns:a16="http://schemas.microsoft.com/office/drawing/2014/main" id="{0A4E8882-F30C-416C-BA58-12E54523781E}"/>
               </a:ext>
             </a:extLst>
           </p:cNvPr>
@@ -4439,7 +4439,7 @@
           <p:cNvPr id="3" name="">
             <a:extLst xmlns:a="http://schemas.openxmlformats.org/drawingml/2006/main">
               <a:ext uri="{FF2B5EF4-FFF2-40B4-BE49-F238E27FC236}">
-                <a16:creationId xmlns:a16="http://schemas.microsoft.com/office/drawing/2014/main" id="{FEA75E41-4C1F-4E5D-B1AF-0646941B2DBC}"/>
+                <a16:creationId xmlns:a16="http://schemas.microsoft.com/office/drawing/2014/main" id="{F8AAEF0F-8400-4190-9B4B-20DCADCC5B88}"/>
               </a:ext>
             </a:extLst>
           </p:cNvPr>
@@ -4471,7 +4471,7 @@
           <p:cNvPr id="4" name="">
             <a:extLst xmlns:a="http://schemas.openxmlformats.org/drawingml/2006/main">
               <a:ext uri="{FF2B5EF4-FFF2-40B4-BE49-F238E27FC236}">
-                <a16:creationId xmlns:a16="http://schemas.microsoft.com/office/drawing/2014/main" id="{0AC795A2-0AA8-41AF-9A72-176953F48AF1}"/>
+                <a16:creationId xmlns:a16="http://schemas.microsoft.com/office/drawing/2014/main" id="{2D8E5EC6-4C62-42C1-931A-58ED6C62DE96}"/>
               </a:ext>
             </a:extLst>
           </p:cNvPr>
@@ -4528,7 +4528,7 @@
           <p:cNvPr id="5" name="">
             <a:extLst xmlns:a="http://schemas.openxmlformats.org/drawingml/2006/main">
               <a:ext uri="{FF2B5EF4-FFF2-40B4-BE49-F238E27FC236}">
-                <a16:creationId xmlns:a16="http://schemas.microsoft.com/office/drawing/2014/main" id="{2EDDE27E-4E79-4188-AD4F-2066B287E38B}"/>
+                <a16:creationId xmlns:a16="http://schemas.microsoft.com/office/drawing/2014/main" id="{50759EC4-C1B5-4FFD-B5FB-3188EB82F887}"/>
               </a:ext>
             </a:extLst>
           </p:cNvPr>
@@ -4585,7 +4585,7 @@
           <p:cNvPr id="6" name="">
             <a:extLst xmlns:a="http://schemas.openxmlformats.org/drawingml/2006/main">
               <a:ext uri="{FF2B5EF4-FFF2-40B4-BE49-F238E27FC236}">
-                <a16:creationId xmlns:a16="http://schemas.microsoft.com/office/drawing/2014/main" id="{2863E5FF-FCF5-40E3-83B8-BA4FF0569015}"/>
+                <a16:creationId xmlns:a16="http://schemas.microsoft.com/office/drawing/2014/main" id="{A494BB12-3121-4F70-80A6-7E7B9984E260}"/>
               </a:ext>
             </a:extLst>
           </p:cNvPr>
@@ -4642,7 +4642,7 @@
           <p:cNvPr id="7" name="">
             <a:extLst xmlns:a="http://schemas.openxmlformats.org/drawingml/2006/main">
               <a:ext uri="{FF2B5EF4-FFF2-40B4-BE49-F238E27FC236}">
-                <a16:creationId xmlns:a16="http://schemas.microsoft.com/office/drawing/2014/main" id="{CB4DEC01-2A66-493D-9A69-753B37CDDD98}"/>
+                <a16:creationId xmlns:a16="http://schemas.microsoft.com/office/drawing/2014/main" id="{DF65FDE5-618A-4FA7-9A83-7BDB53D78C7E}"/>
               </a:ext>
             </a:extLst>
           </p:cNvPr>
@@ -4674,7 +4674,7 @@
           <p:cNvPr id="8" name="">
             <a:extLst xmlns:a="http://schemas.openxmlformats.org/drawingml/2006/main">
               <a:ext uri="{FF2B5EF4-FFF2-40B4-BE49-F238E27FC236}">
-                <a16:creationId xmlns:a16="http://schemas.microsoft.com/office/drawing/2014/main" id="{A40B79AB-AC5D-4983-A356-5A63241666D8}"/>
+                <a16:creationId xmlns:a16="http://schemas.microsoft.com/office/drawing/2014/main" id="{D2122F80-1E6D-45DD-815C-63458A2D08CC}"/>
               </a:ext>
             </a:extLst>
           </p:cNvPr>
@@ -4731,7 +4731,7 @@
           <p:cNvPr id="9" name="">
             <a:extLst xmlns:a="http://schemas.openxmlformats.org/drawingml/2006/main">
               <a:ext uri="{FF2B5EF4-FFF2-40B4-BE49-F238E27FC236}">
-                <a16:creationId xmlns:a16="http://schemas.microsoft.com/office/drawing/2014/main" id="{ED4F3330-8051-4AA6-9570-729DC90FA28D}"/>
+                <a16:creationId xmlns:a16="http://schemas.microsoft.com/office/drawing/2014/main" id="{2AC48053-32B5-434D-8932-34847C8E6EC8}"/>
               </a:ext>
             </a:extLst>
           </p:cNvPr>
@@ -4788,7 +4788,7 @@
           <p:cNvPr id="10" name="">
             <a:extLst xmlns:a="http://schemas.openxmlformats.org/drawingml/2006/main">
               <a:ext uri="{FF2B5EF4-FFF2-40B4-BE49-F238E27FC236}">
-                <a16:creationId xmlns:a16="http://schemas.microsoft.com/office/drawing/2014/main" id="{73A3E149-98EB-4E8F-9045-456072F54C11}"/>
+                <a16:creationId xmlns:a16="http://schemas.microsoft.com/office/drawing/2014/main" id="{A8F3F00F-6BA7-4A33-B671-CA514F83D6AF}"/>
               </a:ext>
             </a:extLst>
           </p:cNvPr>
@@ -4822,7 +4822,7 @@
           <p:cNvPr id="11" name="">
             <a:extLst xmlns:a="http://schemas.openxmlformats.org/drawingml/2006/main">
               <a:ext uri="{FF2B5EF4-FFF2-40B4-BE49-F238E27FC236}">
-                <a16:creationId xmlns:a16="http://schemas.microsoft.com/office/drawing/2014/main" id="{72613745-39EF-45BD-8D71-953082C3A497}"/>
+                <a16:creationId xmlns:a16="http://schemas.microsoft.com/office/drawing/2014/main" id="{65B49EED-D4CD-4440-944C-298494FE8C9B}"/>
               </a:ext>
             </a:extLst>
           </p:cNvPr>
@@ -4854,7 +4854,7 @@
           <p:cNvPr id="12" name="">
             <a:extLst xmlns:a="http://schemas.openxmlformats.org/drawingml/2006/main">
               <a:ext uri="{FF2B5EF4-FFF2-40B4-BE49-F238E27FC236}">
-                <a16:creationId xmlns:a16="http://schemas.microsoft.com/office/drawing/2014/main" id="{D6516309-7964-4781-B427-41AE0CC21DFF}"/>
+                <a16:creationId xmlns:a16="http://schemas.microsoft.com/office/drawing/2014/main" id="{59B25487-1DA5-4046-AEE0-6BD4B10DE3DF}"/>
               </a:ext>
             </a:extLst>
           </p:cNvPr>
@@ -4911,7 +4911,7 @@
           <p:cNvPr id="13" name="">
             <a:extLst xmlns:a="http://schemas.openxmlformats.org/drawingml/2006/main">
               <a:ext uri="{FF2B5EF4-FFF2-40B4-BE49-F238E27FC236}">
-                <a16:creationId xmlns:a16="http://schemas.microsoft.com/office/drawing/2014/main" id="{6FCB0EE2-40B3-429E-9EF6-2D6B7CD7E249}"/>
+                <a16:creationId xmlns:a16="http://schemas.microsoft.com/office/drawing/2014/main" id="{F46D800A-7F5D-4C7F-A479-28A58149FAB0}"/>
               </a:ext>
             </a:extLst>
           </p:cNvPr>
@@ -4968,7 +4968,7 @@
           <p:cNvPr id="14" name="">
             <a:extLst xmlns:a="http://schemas.openxmlformats.org/drawingml/2006/main">
               <a:ext uri="{FF2B5EF4-FFF2-40B4-BE49-F238E27FC236}">
-                <a16:creationId xmlns:a16="http://schemas.microsoft.com/office/drawing/2014/main" id="{18642E5D-343E-40C5-A7AF-4EC96F476F12}"/>
+                <a16:creationId xmlns:a16="http://schemas.microsoft.com/office/drawing/2014/main" id="{4000122F-413B-4B04-BB3A-ABBA1FB09A0B}"/>
               </a:ext>
             </a:extLst>
           </p:cNvPr>
@@ -5002,7 +5002,7 @@
           <p:cNvPr id="15" name="">
             <a:extLst xmlns:a="http://schemas.openxmlformats.org/drawingml/2006/main">
               <a:ext uri="{FF2B5EF4-FFF2-40B4-BE49-F238E27FC236}">
-                <a16:creationId xmlns:a16="http://schemas.microsoft.com/office/drawing/2014/main" id="{06C6DA3D-813B-48D2-9BE5-4DF1A19F11C6}"/>
+                <a16:creationId xmlns:a16="http://schemas.microsoft.com/office/drawing/2014/main" id="{87468FAB-7E90-413A-95B0-666018066EB9}"/>
               </a:ext>
             </a:extLst>
           </p:cNvPr>
@@ -5034,7 +5034,7 @@
           <p:cNvPr id="16" name="">
             <a:extLst xmlns:a="http://schemas.openxmlformats.org/drawingml/2006/main">
               <a:ext uri="{FF2B5EF4-FFF2-40B4-BE49-F238E27FC236}">
-                <a16:creationId xmlns:a16="http://schemas.microsoft.com/office/drawing/2014/main" id="{57636031-9319-47B8-B8FC-C93627BEBB0D}"/>
+                <a16:creationId xmlns:a16="http://schemas.microsoft.com/office/drawing/2014/main" id="{0772D436-2664-427E-89D2-BA46B20687A3}"/>
               </a:ext>
             </a:extLst>
           </p:cNvPr>
@@ -5091,7 +5091,7 @@
           <p:cNvPr id="17" name="">
             <a:extLst xmlns:a="http://schemas.openxmlformats.org/drawingml/2006/main">
               <a:ext uri="{FF2B5EF4-FFF2-40B4-BE49-F238E27FC236}">
-                <a16:creationId xmlns:a16="http://schemas.microsoft.com/office/drawing/2014/main" id="{46270E4F-3D4E-4240-A6DA-E32D970C573E}"/>
+                <a16:creationId xmlns:a16="http://schemas.microsoft.com/office/drawing/2014/main" id="{22070FCB-FCD2-4577-A9F1-6ED3DB79C1F8}"/>
               </a:ext>
             </a:extLst>
           </p:cNvPr>
@@ -5148,7 +5148,7 @@
           <p:cNvPr id="18" name="">
             <a:extLst xmlns:a="http://schemas.openxmlformats.org/drawingml/2006/main">
               <a:ext uri="{FF2B5EF4-FFF2-40B4-BE49-F238E27FC236}">
-                <a16:creationId xmlns:a16="http://schemas.microsoft.com/office/drawing/2014/main" id="{FA396159-7E78-4F4A-9033-116BEA388978}"/>
+                <a16:creationId xmlns:a16="http://schemas.microsoft.com/office/drawing/2014/main" id="{CFC6BA35-1FB4-4C42-8672-6408540FFED1}"/>
               </a:ext>
             </a:extLst>
           </p:cNvPr>
@@ -5182,7 +5182,7 @@
           <p:cNvPr id="19" name="">
             <a:extLst xmlns:a="http://schemas.openxmlformats.org/drawingml/2006/main">
               <a:ext uri="{FF2B5EF4-FFF2-40B4-BE49-F238E27FC236}">
-                <a16:creationId xmlns:a16="http://schemas.microsoft.com/office/drawing/2014/main" id="{0C5BB52E-91F4-4AF7-A9ED-4221D92CF86C}"/>
+                <a16:creationId xmlns:a16="http://schemas.microsoft.com/office/drawing/2014/main" id="{18FA5636-579F-41DC-9593-65642C0B8056}"/>
               </a:ext>
             </a:extLst>
           </p:cNvPr>
@@ -5214,7 +5214,7 @@
           <p:cNvPr id="20" name="">
             <a:extLst xmlns:a="http://schemas.openxmlformats.org/drawingml/2006/main">
               <a:ext uri="{FF2B5EF4-FFF2-40B4-BE49-F238E27FC236}">
-                <a16:creationId xmlns:a16="http://schemas.microsoft.com/office/drawing/2014/main" id="{D927A85A-D1A4-41F6-9DA8-756B0739BC6E}"/>
+                <a16:creationId xmlns:a16="http://schemas.microsoft.com/office/drawing/2014/main" id="{356AF3EA-1E60-42AF-851A-61A912127AB4}"/>
               </a:ext>
             </a:extLst>
           </p:cNvPr>
@@ -5271,7 +5271,7 @@
           <p:cNvPr id="21" name="">
             <a:extLst xmlns:a="http://schemas.openxmlformats.org/drawingml/2006/main">
               <a:ext uri="{FF2B5EF4-FFF2-40B4-BE49-F238E27FC236}">
-                <a16:creationId xmlns:a16="http://schemas.microsoft.com/office/drawing/2014/main" id="{D047C5F9-3907-4799-8A8C-7A7BFFCE7B3B}"/>
+                <a16:creationId xmlns:a16="http://schemas.microsoft.com/office/drawing/2014/main" id="{876CEDB0-D2F0-4070-8A9C-2BFD7FDB7A66}"/>
               </a:ext>
             </a:extLst>
           </p:cNvPr>
@@ -5328,7 +5328,7 @@
           <p:cNvPr id="22" name="">
             <a:extLst xmlns:a="http://schemas.openxmlformats.org/drawingml/2006/main">
               <a:ext uri="{FF2B5EF4-FFF2-40B4-BE49-F238E27FC236}">
-                <a16:creationId xmlns:a16="http://schemas.microsoft.com/office/drawing/2014/main" id="{D25365F2-21BF-4FFB-8872-198D61D94675}"/>
+                <a16:creationId xmlns:a16="http://schemas.microsoft.com/office/drawing/2014/main" id="{98655EA0-C36B-4138-B985-D420F0379848}"/>
               </a:ext>
             </a:extLst>
           </p:cNvPr>
@@ -5383,7 +5383,7 @@
     </p:spTree>
     <p:extLst>
       <p:ext uri="{BB962C8B-B14F-4D97-AF65-F5344CB8AC3E}">
-        <p14:creationId xmlns:p14="http://schemas.microsoft.com/office/powerpoint/2010/main" val="424141533"/>
+        <p14:creationId xmlns:p14="http://schemas.microsoft.com/office/powerpoint/2010/main" val="88501374"/>
       </p:ext>
     </p:extLst>
   </p:cSld>
@@ -5584,7 +5584,7 @@
           <p:cNvPr id="23" name="">
             <a:extLst xmlns:a="http://schemas.openxmlformats.org/drawingml/2006/main">
               <a:ext uri="{FF2B5EF4-FFF2-40B4-BE49-F238E27FC236}">
-                <a16:creationId xmlns:a16="http://schemas.microsoft.com/office/drawing/2014/main" id="{6A8C227F-59A3-4398-BA25-692270E11D5B}"/>
+                <a16:creationId xmlns:a16="http://schemas.microsoft.com/office/drawing/2014/main" id="{E58A263E-431E-41A0-958D-1E12A571E7C0}"/>
               </a:ext>
             </a:extLst>
           </p:cNvPr>
@@ -5616,7 +5616,7 @@
           <p:cNvPr id="2" name="">
             <a:extLst xmlns:a="http://schemas.openxmlformats.org/drawingml/2006/main">
               <a:ext uri="{FF2B5EF4-FFF2-40B4-BE49-F238E27FC236}">
-                <a16:creationId xmlns:a16="http://schemas.microsoft.com/office/drawing/2014/main" id="{D474D4EC-A885-495E-8979-C00F3904B6C2}"/>
+                <a16:creationId xmlns:a16="http://schemas.microsoft.com/office/drawing/2014/main" id="{7FA7DCAC-89B5-4F19-B4C9-4678D3232325}"/>
               </a:ext>
             </a:extLst>
           </p:cNvPr>
@@ -5673,7 +5673,7 @@
           <p:cNvPr id="3" name="">
             <a:extLst xmlns:a="http://schemas.openxmlformats.org/drawingml/2006/main">
               <a:ext uri="{FF2B5EF4-FFF2-40B4-BE49-F238E27FC236}">
-                <a16:creationId xmlns:a16="http://schemas.microsoft.com/office/drawing/2014/main" id="{DEEDC647-6BDE-4C49-B055-624C7F4370A6}"/>
+                <a16:creationId xmlns:a16="http://schemas.microsoft.com/office/drawing/2014/main" id="{50632E2A-8E8A-4861-B4DD-E5E4C6405CD3}"/>
               </a:ext>
             </a:extLst>
           </p:cNvPr>
@@ -5705,7 +5705,7 @@
           <p:cNvPr id="4" name="">
             <a:extLst xmlns:a="http://schemas.openxmlformats.org/drawingml/2006/main">
               <a:ext uri="{FF2B5EF4-FFF2-40B4-BE49-F238E27FC236}">
-                <a16:creationId xmlns:a16="http://schemas.microsoft.com/office/drawing/2014/main" id="{5555F9BD-65B0-4987-A7BC-0C5D4F2C76A3}"/>
+                <a16:creationId xmlns:a16="http://schemas.microsoft.com/office/drawing/2014/main" id="{D45B62C3-C58A-448E-8BC9-03717582EF36}"/>
               </a:ext>
             </a:extLst>
           </p:cNvPr>
@@ -5762,7 +5762,7 @@
           <p:cNvPr id="5" name="">
             <a:extLst xmlns:a="http://schemas.openxmlformats.org/drawingml/2006/main">
               <a:ext uri="{FF2B5EF4-FFF2-40B4-BE49-F238E27FC236}">
-                <a16:creationId xmlns:a16="http://schemas.microsoft.com/office/drawing/2014/main" id="{22873E39-E295-48F8-81D7-25AFCAD85837}"/>
+                <a16:creationId xmlns:a16="http://schemas.microsoft.com/office/drawing/2014/main" id="{557419B1-76D2-4D1F-AA68-BD1E1F2EF37F}"/>
               </a:ext>
             </a:extLst>
           </p:cNvPr>
@@ -5819,7 +5819,7 @@
           <p:cNvPr id="6" name="">
             <a:extLst xmlns:a="http://schemas.openxmlformats.org/drawingml/2006/main">
               <a:ext uri="{FF2B5EF4-FFF2-40B4-BE49-F238E27FC236}">
-                <a16:creationId xmlns:a16="http://schemas.microsoft.com/office/drawing/2014/main" id="{A32CBEC9-CED0-4182-BAC3-01A8B58225F8}"/>
+                <a16:creationId xmlns:a16="http://schemas.microsoft.com/office/drawing/2014/main" id="{4B02C820-C297-4B62-99A5-2A68D04C171F}"/>
               </a:ext>
             </a:extLst>
           </p:cNvPr>
@@ -5876,7 +5876,7 @@
           <p:cNvPr id="7" name="">
             <a:extLst xmlns:a="http://schemas.openxmlformats.org/drawingml/2006/main">
               <a:ext uri="{FF2B5EF4-FFF2-40B4-BE49-F238E27FC236}">
-                <a16:creationId xmlns:a16="http://schemas.microsoft.com/office/drawing/2014/main" id="{D70520D2-E5E2-4AE0-B337-3CCA93080A4C}"/>
+                <a16:creationId xmlns:a16="http://schemas.microsoft.com/office/drawing/2014/main" id="{28EAB1CE-58AF-4387-B51E-61935A4FBF84}"/>
               </a:ext>
             </a:extLst>
           </p:cNvPr>
@@ -5908,7 +5908,7 @@
           <p:cNvPr id="8" name="">
             <a:extLst xmlns:a="http://schemas.openxmlformats.org/drawingml/2006/main">
               <a:ext uri="{FF2B5EF4-FFF2-40B4-BE49-F238E27FC236}">
-                <a16:creationId xmlns:a16="http://schemas.microsoft.com/office/drawing/2014/main" id="{950FB1DD-7878-413D-A66A-2928AE70C15F}"/>
+                <a16:creationId xmlns:a16="http://schemas.microsoft.com/office/drawing/2014/main" id="{E93395D8-C634-4737-BE0D-C87EF27A6C55}"/>
               </a:ext>
             </a:extLst>
           </p:cNvPr>
@@ -5965,7 +5965,7 @@
           <p:cNvPr id="9" name="">
             <a:extLst xmlns:a="http://schemas.openxmlformats.org/drawingml/2006/main">
               <a:ext uri="{FF2B5EF4-FFF2-40B4-BE49-F238E27FC236}">
-                <a16:creationId xmlns:a16="http://schemas.microsoft.com/office/drawing/2014/main" id="{996B4CA9-87B4-4223-B417-F377040FF354}"/>
+                <a16:creationId xmlns:a16="http://schemas.microsoft.com/office/drawing/2014/main" id="{7B7AEC74-35F3-4674-93CD-1CEB8360837B}"/>
               </a:ext>
             </a:extLst>
           </p:cNvPr>
@@ -6022,7 +6022,7 @@
           <p:cNvPr id="10" name="">
             <a:extLst xmlns:a="http://schemas.openxmlformats.org/drawingml/2006/main">
               <a:ext uri="{FF2B5EF4-FFF2-40B4-BE49-F238E27FC236}">
-                <a16:creationId xmlns:a16="http://schemas.microsoft.com/office/drawing/2014/main" id="{3DDAC0DD-6AD9-44A9-9E6C-29E85EE6E8B6}"/>
+                <a16:creationId xmlns:a16="http://schemas.microsoft.com/office/drawing/2014/main" id="{3759FDB0-FAC2-470F-B198-9C9452F7FA4D}"/>
               </a:ext>
             </a:extLst>
           </p:cNvPr>
@@ -6056,7 +6056,7 @@
           <p:cNvPr id="11" name="">
             <a:extLst xmlns:a="http://schemas.openxmlformats.org/drawingml/2006/main">
               <a:ext uri="{FF2B5EF4-FFF2-40B4-BE49-F238E27FC236}">
-                <a16:creationId xmlns:a16="http://schemas.microsoft.com/office/drawing/2014/main" id="{14CC40CB-7C98-4D68-BE75-19FA80264BC7}"/>
+                <a16:creationId xmlns:a16="http://schemas.microsoft.com/office/drawing/2014/main" id="{43D55C75-7772-46A2-BE43-C03A4C6960FD}"/>
               </a:ext>
             </a:extLst>
           </p:cNvPr>
@@ -6088,7 +6088,7 @@
           <p:cNvPr id="12" name="">
             <a:extLst xmlns:a="http://schemas.openxmlformats.org/drawingml/2006/main">
               <a:ext uri="{FF2B5EF4-FFF2-40B4-BE49-F238E27FC236}">
-                <a16:creationId xmlns:a16="http://schemas.microsoft.com/office/drawing/2014/main" id="{565BFC98-D551-4523-A649-F008EAA81E35}"/>
+                <a16:creationId xmlns:a16="http://schemas.microsoft.com/office/drawing/2014/main" id="{5497E452-4A38-4FD3-B072-083C14C92DC7}"/>
               </a:ext>
             </a:extLst>
           </p:cNvPr>
@@ -6145,7 +6145,7 @@
           <p:cNvPr id="13" name="">
             <a:extLst xmlns:a="http://schemas.openxmlformats.org/drawingml/2006/main">
               <a:ext uri="{FF2B5EF4-FFF2-40B4-BE49-F238E27FC236}">
-                <a16:creationId xmlns:a16="http://schemas.microsoft.com/office/drawing/2014/main" id="{47AD1ED1-7CE4-447D-BC27-0C589C318FA3}"/>
+                <a16:creationId xmlns:a16="http://schemas.microsoft.com/office/drawing/2014/main" id="{9DA3942F-4E22-4F1C-8868-3D95B05A34E4}"/>
               </a:ext>
             </a:extLst>
           </p:cNvPr>
@@ -6202,7 +6202,7 @@
           <p:cNvPr id="14" name="">
             <a:extLst xmlns:a="http://schemas.openxmlformats.org/drawingml/2006/main">
               <a:ext uri="{FF2B5EF4-FFF2-40B4-BE49-F238E27FC236}">
-                <a16:creationId xmlns:a16="http://schemas.microsoft.com/office/drawing/2014/main" id="{4B77AF45-2B07-413F-A487-0994EB50EEB6}"/>
+                <a16:creationId xmlns:a16="http://schemas.microsoft.com/office/drawing/2014/main" id="{DBFD0B8C-15AF-4F16-95AE-5F3060582A2C}"/>
               </a:ext>
             </a:extLst>
           </p:cNvPr>
@@ -6236,7 +6236,7 @@
           <p:cNvPr id="15" name="">
             <a:extLst xmlns:a="http://schemas.openxmlformats.org/drawingml/2006/main">
               <a:ext uri="{FF2B5EF4-FFF2-40B4-BE49-F238E27FC236}">
-                <a16:creationId xmlns:a16="http://schemas.microsoft.com/office/drawing/2014/main" id="{C4D7D6B0-F844-410F-B93D-3A8256A608AA}"/>
+                <a16:creationId xmlns:a16="http://schemas.microsoft.com/office/drawing/2014/main" id="{2F232E79-62A6-4691-A424-CD4F6571EACE}"/>
               </a:ext>
             </a:extLst>
           </p:cNvPr>
@@ -6268,7 +6268,7 @@
           <p:cNvPr id="16" name="">
             <a:extLst xmlns:a="http://schemas.openxmlformats.org/drawingml/2006/main">
               <a:ext uri="{FF2B5EF4-FFF2-40B4-BE49-F238E27FC236}">
-                <a16:creationId xmlns:a16="http://schemas.microsoft.com/office/drawing/2014/main" id="{BF5C7203-34C9-4E73-B953-38BEFFC0A4B4}"/>
+                <a16:creationId xmlns:a16="http://schemas.microsoft.com/office/drawing/2014/main" id="{6347BF47-5FAE-4F84-B2E9-0CC7185A99B1}"/>
               </a:ext>
             </a:extLst>
           </p:cNvPr>
@@ -6325,7 +6325,7 @@
           <p:cNvPr id="17" name="">
             <a:extLst xmlns:a="http://schemas.openxmlformats.org/drawingml/2006/main">
               <a:ext uri="{FF2B5EF4-FFF2-40B4-BE49-F238E27FC236}">
-                <a16:creationId xmlns:a16="http://schemas.microsoft.com/office/drawing/2014/main" id="{946135B4-F80E-4207-81F0-B165DAE821D7}"/>
+                <a16:creationId xmlns:a16="http://schemas.microsoft.com/office/drawing/2014/main" id="{6C74E8DD-4F5F-4A00-937F-1ECF083E0B6A}"/>
               </a:ext>
             </a:extLst>
           </p:cNvPr>
@@ -6382,7 +6382,7 @@
           <p:cNvPr id="18" name="">
             <a:extLst xmlns:a="http://schemas.openxmlformats.org/drawingml/2006/main">
               <a:ext uri="{FF2B5EF4-FFF2-40B4-BE49-F238E27FC236}">
-                <a16:creationId xmlns:a16="http://schemas.microsoft.com/office/drawing/2014/main" id="{96DBFCCD-95C1-4D75-B9C3-E6C83187B5B5}"/>
+                <a16:creationId xmlns:a16="http://schemas.microsoft.com/office/drawing/2014/main" id="{F6B019E0-629E-4546-8121-C805D51150EA}"/>
               </a:ext>
             </a:extLst>
           </p:cNvPr>
@@ -6416,7 +6416,7 @@
           <p:cNvPr id="19" name="">
             <a:extLst xmlns:a="http://schemas.openxmlformats.org/drawingml/2006/main">
               <a:ext uri="{FF2B5EF4-FFF2-40B4-BE49-F238E27FC236}">
-                <a16:creationId xmlns:a16="http://schemas.microsoft.com/office/drawing/2014/main" id="{33206B80-8E3D-45B3-8E88-B06F27661F1A}"/>
+                <a16:creationId xmlns:a16="http://schemas.microsoft.com/office/drawing/2014/main" id="{C18A0416-FE65-4237-B3C5-621EAC97A463}"/>
               </a:ext>
             </a:extLst>
           </p:cNvPr>
@@ -6448,7 +6448,7 @@
           <p:cNvPr id="20" name="">
             <a:extLst xmlns:a="http://schemas.openxmlformats.org/drawingml/2006/main">
               <a:ext uri="{FF2B5EF4-FFF2-40B4-BE49-F238E27FC236}">
-                <a16:creationId xmlns:a16="http://schemas.microsoft.com/office/drawing/2014/main" id="{E85B4B99-2698-4E30-8A45-58650C7954D6}"/>
+                <a16:creationId xmlns:a16="http://schemas.microsoft.com/office/drawing/2014/main" id="{40C52B0B-7F66-4A0D-9EDC-B66DEE7F5F23}"/>
               </a:ext>
             </a:extLst>
           </p:cNvPr>
@@ -6505,7 +6505,7 @@
           <p:cNvPr id="21" name="">
             <a:extLst xmlns:a="http://schemas.openxmlformats.org/drawingml/2006/main">
               <a:ext uri="{FF2B5EF4-FFF2-40B4-BE49-F238E27FC236}">
-                <a16:creationId xmlns:a16="http://schemas.microsoft.com/office/drawing/2014/main" id="{B447E1C1-0933-40C6-9115-D4D4A8435C61}"/>
+                <a16:creationId xmlns:a16="http://schemas.microsoft.com/office/drawing/2014/main" id="{95B19424-21A7-4E6C-8BF9-58E3443B2ABA}"/>
               </a:ext>
             </a:extLst>
           </p:cNvPr>
@@ -6562,7 +6562,7 @@
           <p:cNvPr id="22" name="">
             <a:extLst xmlns:a="http://schemas.openxmlformats.org/drawingml/2006/main">
               <a:ext uri="{FF2B5EF4-FFF2-40B4-BE49-F238E27FC236}">
-                <a16:creationId xmlns:a16="http://schemas.microsoft.com/office/drawing/2014/main" id="{FF146535-3248-40D2-B92E-A080658F560F}"/>
+                <a16:creationId xmlns:a16="http://schemas.microsoft.com/office/drawing/2014/main" id="{2958AFDE-B109-4FFF-8ACA-683F9150FABD}"/>
               </a:ext>
             </a:extLst>
           </p:cNvPr>
@@ -6617,7 +6617,7 @@
     </p:spTree>
     <p:extLst>
       <p:ext uri="{BB962C8B-B14F-4D97-AF65-F5344CB8AC3E}">
-        <p14:creationId xmlns:p14="http://schemas.microsoft.com/office/powerpoint/2010/main" val="577182532"/>
+        <p14:creationId xmlns:p14="http://schemas.microsoft.com/office/powerpoint/2010/main" val="940332872"/>
       </p:ext>
     </p:extLst>
   </p:cSld>
@@ -6818,7 +6818,7 @@
           <p:cNvPr id="16" name="">
             <a:extLst xmlns:a="http://schemas.openxmlformats.org/drawingml/2006/main">
               <a:ext uri="{FF2B5EF4-FFF2-40B4-BE49-F238E27FC236}">
-                <a16:creationId xmlns:a16="http://schemas.microsoft.com/office/drawing/2014/main" id="{57F06F9C-97AB-41D8-B917-B375012D656D}"/>
+                <a16:creationId xmlns:a16="http://schemas.microsoft.com/office/drawing/2014/main" id="{91490C86-E2C5-4C21-8F3C-2D25699A1932}"/>
               </a:ext>
             </a:extLst>
           </p:cNvPr>
@@ -6850,7 +6850,7 @@
           <p:cNvPr id="2" name="">
             <a:extLst xmlns:a="http://schemas.openxmlformats.org/drawingml/2006/main">
               <a:ext uri="{FF2B5EF4-FFF2-40B4-BE49-F238E27FC236}">
-                <a16:creationId xmlns:a16="http://schemas.microsoft.com/office/drawing/2014/main" id="{181B5EB1-9CCE-4EB2-9D8B-CEACEC2C07AF}"/>
+                <a16:creationId xmlns:a16="http://schemas.microsoft.com/office/drawing/2014/main" id="{0448F058-C9A6-4FC2-9F6D-BD98FB20AE2C}"/>
               </a:ext>
             </a:extLst>
           </p:cNvPr>
@@ -6907,7 +6907,7 @@
           <p:cNvPr id="3" name="">
             <a:extLst xmlns:a="http://schemas.openxmlformats.org/drawingml/2006/main">
               <a:ext uri="{FF2B5EF4-FFF2-40B4-BE49-F238E27FC236}">
-                <a16:creationId xmlns:a16="http://schemas.microsoft.com/office/drawing/2014/main" id="{984AA904-69AB-492D-A876-811126EF55E2}"/>
+                <a16:creationId xmlns:a16="http://schemas.microsoft.com/office/drawing/2014/main" id="{7024E1AC-D6A4-40CA-9BDC-303E0E005782}"/>
               </a:ext>
             </a:extLst>
           </p:cNvPr>
@@ -6939,7 +6939,7 @@
           <p:cNvPr id="4" name="">
             <a:extLst xmlns:a="http://schemas.openxmlformats.org/drawingml/2006/main">
               <a:ext uri="{FF2B5EF4-FFF2-40B4-BE49-F238E27FC236}">
-                <a16:creationId xmlns:a16="http://schemas.microsoft.com/office/drawing/2014/main" id="{B42E146A-2C1B-49FD-969A-A44272D9D1C7}"/>
+                <a16:creationId xmlns:a16="http://schemas.microsoft.com/office/drawing/2014/main" id="{7C73F98C-0C43-471D-89B0-113A6AAFCC10}"/>
               </a:ext>
             </a:extLst>
           </p:cNvPr>
@@ -6996,7 +6996,7 @@
           <p:cNvPr id="5" name="">
             <a:extLst xmlns:a="http://schemas.openxmlformats.org/drawingml/2006/main">
               <a:ext uri="{FF2B5EF4-FFF2-40B4-BE49-F238E27FC236}">
-                <a16:creationId xmlns:a16="http://schemas.microsoft.com/office/drawing/2014/main" id="{17C072EA-C891-4404-B94F-F03C7E95CC2D}"/>
+                <a16:creationId xmlns:a16="http://schemas.microsoft.com/office/drawing/2014/main" id="{DB4BBFDF-A18B-4B36-9BFE-E6A4ADDB206E}"/>
               </a:ext>
             </a:extLst>
           </p:cNvPr>
@@ -7053,7 +7053,7 @@
           <p:cNvPr id="6" name="">
             <a:extLst xmlns:a="http://schemas.openxmlformats.org/drawingml/2006/main">
               <a:ext uri="{FF2B5EF4-FFF2-40B4-BE49-F238E27FC236}">
-                <a16:creationId xmlns:a16="http://schemas.microsoft.com/office/drawing/2014/main" id="{B7C8B038-FC26-4599-9897-B0C74C0FE31C}"/>
+                <a16:creationId xmlns:a16="http://schemas.microsoft.com/office/drawing/2014/main" id="{0AAD0720-1094-4CBC-B7D8-D4B327B9165F}"/>
               </a:ext>
             </a:extLst>
           </p:cNvPr>
@@ -7110,7 +7110,7 @@
           <p:cNvPr id="7" name="">
             <a:extLst xmlns:a="http://schemas.openxmlformats.org/drawingml/2006/main">
               <a:ext uri="{FF2B5EF4-FFF2-40B4-BE49-F238E27FC236}">
-                <a16:creationId xmlns:a16="http://schemas.microsoft.com/office/drawing/2014/main" id="{E7B99714-1045-43BD-ACD2-5E70AFA18273}"/>
+                <a16:creationId xmlns:a16="http://schemas.microsoft.com/office/drawing/2014/main" id="{50E143FE-8439-438B-9BF4-99BE4421DA6E}"/>
               </a:ext>
             </a:extLst>
           </p:cNvPr>
@@ -7142,7 +7142,7 @@
           <p:cNvPr id="8" name="">
             <a:extLst xmlns:a="http://schemas.openxmlformats.org/drawingml/2006/main">
               <a:ext uri="{FF2B5EF4-FFF2-40B4-BE49-F238E27FC236}">
-                <a16:creationId xmlns:a16="http://schemas.microsoft.com/office/drawing/2014/main" id="{51617076-06A8-4127-8682-946D7B878BD4}"/>
+                <a16:creationId xmlns:a16="http://schemas.microsoft.com/office/drawing/2014/main" id="{21DC0245-9079-4113-BE94-6469F27968F2}"/>
               </a:ext>
             </a:extLst>
           </p:cNvPr>
@@ -7199,7 +7199,7 @@
           <p:cNvPr id="9" name="">
             <a:extLst xmlns:a="http://schemas.openxmlformats.org/drawingml/2006/main">
               <a:ext uri="{FF2B5EF4-FFF2-40B4-BE49-F238E27FC236}">
-                <a16:creationId xmlns:a16="http://schemas.microsoft.com/office/drawing/2014/main" id="{73EF7F6D-C436-4BF8-84E5-CDCA2E1D3581}"/>
+                <a16:creationId xmlns:a16="http://schemas.microsoft.com/office/drawing/2014/main" id="{E0BFF718-B1CA-4973-9EE5-2C1E521BAFA1}"/>
               </a:ext>
             </a:extLst>
           </p:cNvPr>
@@ -7256,7 +7256,7 @@
           <p:cNvPr id="10" name="">
             <a:extLst xmlns:a="http://schemas.openxmlformats.org/drawingml/2006/main">
               <a:ext uri="{FF2B5EF4-FFF2-40B4-BE49-F238E27FC236}">
-                <a16:creationId xmlns:a16="http://schemas.microsoft.com/office/drawing/2014/main" id="{D02A14BF-B4AD-4464-9696-259B2F542F2F}"/>
+                <a16:creationId xmlns:a16="http://schemas.microsoft.com/office/drawing/2014/main" id="{543CA54D-03F5-4CD7-9E81-5D7A44706B4D}"/>
               </a:ext>
             </a:extLst>
           </p:cNvPr>
@@ -7313,7 +7313,7 @@
           <p:cNvPr id="11" name="">
             <a:extLst xmlns:a="http://schemas.openxmlformats.org/drawingml/2006/main">
               <a:ext uri="{FF2B5EF4-FFF2-40B4-BE49-F238E27FC236}">
-                <a16:creationId xmlns:a16="http://schemas.microsoft.com/office/drawing/2014/main" id="{12423F8E-7628-438E-AA8D-B2373481A74F}"/>
+                <a16:creationId xmlns:a16="http://schemas.microsoft.com/office/drawing/2014/main" id="{75E90E79-6927-47E7-81AE-DCA7028586AE}"/>
               </a:ext>
             </a:extLst>
           </p:cNvPr>
@@ -7345,7 +7345,7 @@
           <p:cNvPr id="12" name="">
             <a:extLst xmlns:a="http://schemas.openxmlformats.org/drawingml/2006/main">
               <a:ext uri="{FF2B5EF4-FFF2-40B4-BE49-F238E27FC236}">
-                <a16:creationId xmlns:a16="http://schemas.microsoft.com/office/drawing/2014/main" id="{C741AC39-5B6D-4199-B346-6A1AC65298A6}"/>
+                <a16:creationId xmlns:a16="http://schemas.microsoft.com/office/drawing/2014/main" id="{042FC3B1-0901-44A8-93CD-259F92271F29}"/>
               </a:ext>
             </a:extLst>
           </p:cNvPr>
@@ -7402,7 +7402,7 @@
           <p:cNvPr id="13" name="">
             <a:extLst xmlns:a="http://schemas.openxmlformats.org/drawingml/2006/main">
               <a:ext uri="{FF2B5EF4-FFF2-40B4-BE49-F238E27FC236}">
-                <a16:creationId xmlns:a16="http://schemas.microsoft.com/office/drawing/2014/main" id="{9364F783-690B-4E8A-A06C-A1C6C6E463A0}"/>
+                <a16:creationId xmlns:a16="http://schemas.microsoft.com/office/drawing/2014/main" id="{95AC9ECA-EA38-4EDA-89DE-5F2DED379EB0}"/>
               </a:ext>
             </a:extLst>
           </p:cNvPr>
@@ -7459,7 +7459,7 @@
           <p:cNvPr id="14" name="">
             <a:extLst xmlns:a="http://schemas.openxmlformats.org/drawingml/2006/main">
               <a:ext uri="{FF2B5EF4-FFF2-40B4-BE49-F238E27FC236}">
-                <a16:creationId xmlns:a16="http://schemas.microsoft.com/office/drawing/2014/main" id="{791CC48F-4F93-4F3C-8020-988C40ED73FB}"/>
+                <a16:creationId xmlns:a16="http://schemas.microsoft.com/office/drawing/2014/main" id="{6207F78D-C23D-40C1-A125-8DF5ACACA224}"/>
               </a:ext>
             </a:extLst>
           </p:cNvPr>
@@ -7516,7 +7516,7 @@
           <p:cNvPr id="15" name="">
             <a:extLst xmlns:a="http://schemas.openxmlformats.org/drawingml/2006/main">
               <a:ext uri="{FF2B5EF4-FFF2-40B4-BE49-F238E27FC236}">
-                <a16:creationId xmlns:a16="http://schemas.microsoft.com/office/drawing/2014/main" id="{BE864938-1ED0-4073-AFCA-A873543B21A2}"/>
+                <a16:creationId xmlns:a16="http://schemas.microsoft.com/office/drawing/2014/main" id="{99588C28-62DD-43E7-9C93-CC711E41CAE2}"/>
               </a:ext>
             </a:extLst>
           </p:cNvPr>
@@ -7571,7 +7571,7 @@
     </p:spTree>
     <p:extLst>
       <p:ext uri="{BB962C8B-B14F-4D97-AF65-F5344CB8AC3E}">
-        <p14:creationId xmlns:p14="http://schemas.microsoft.com/office/powerpoint/2010/main" val="620674399"/>
+        <p14:creationId xmlns:p14="http://schemas.microsoft.com/office/powerpoint/2010/main" val="2013760509"/>
       </p:ext>
     </p:extLst>
   </p:cSld>
@@ -7769,10 +7769,10 @@
       </p:grpSpPr>
       <p:sp>
         <p:nvSpPr>
-          <p:cNvPr id="23" name="">
-            <a:extLst xmlns:a="http://schemas.openxmlformats.org/drawingml/2006/main">
-              <a:ext uri="{FF2B5EF4-FFF2-40B4-BE49-F238E27FC236}">
-                <a16:creationId xmlns:a16="http://schemas.microsoft.com/office/drawing/2014/main" id="{F868F40E-6AFC-4503-985C-38CE8D37C217}"/>
+          <p:cNvPr id="26" name="">
+            <a:extLst xmlns:a="http://schemas.openxmlformats.org/drawingml/2006/main">
+              <a:ext uri="{FF2B5EF4-FFF2-40B4-BE49-F238E27FC236}">
+                <a16:creationId xmlns:a16="http://schemas.microsoft.com/office/drawing/2014/main" id="{8B61F174-8A6F-4F26-9645-FC8A98CA1C1D}"/>
               </a:ext>
             </a:extLst>
           </p:cNvPr>
@@ -7804,7 +7804,7 @@
           <p:cNvPr id="2" name="">
             <a:extLst xmlns:a="http://schemas.openxmlformats.org/drawingml/2006/main">
               <a:ext uri="{FF2B5EF4-FFF2-40B4-BE49-F238E27FC236}">
-                <a16:creationId xmlns:a16="http://schemas.microsoft.com/office/drawing/2014/main" id="{4D7631AD-9244-4A0E-B976-8F46928F99F4}"/>
+                <a16:creationId xmlns:a16="http://schemas.microsoft.com/office/drawing/2014/main" id="{FF24DA16-BCD5-43CE-A1F5-EB1ECF66C85E}"/>
               </a:ext>
             </a:extLst>
           </p:cNvPr>
@@ -7861,7 +7861,7 @@
           <p:cNvPr id="3" name="">
             <a:extLst xmlns:a="http://schemas.openxmlformats.org/drawingml/2006/main">
               <a:ext uri="{FF2B5EF4-FFF2-40B4-BE49-F238E27FC236}">
-                <a16:creationId xmlns:a16="http://schemas.microsoft.com/office/drawing/2014/main" id="{4AC6BA1D-A7D1-4BE1-B7F8-2413613DB87E}"/>
+                <a16:creationId xmlns:a16="http://schemas.microsoft.com/office/drawing/2014/main" id="{5625651E-B9B4-4746-BC7D-51000ECE6FEA}"/>
               </a:ext>
             </a:extLst>
           </p:cNvPr>
@@ -7893,7 +7893,7 @@
           <p:cNvPr id="4" name="">
             <a:extLst xmlns:a="http://schemas.openxmlformats.org/drawingml/2006/main">
               <a:ext uri="{FF2B5EF4-FFF2-40B4-BE49-F238E27FC236}">
-                <a16:creationId xmlns:a16="http://schemas.microsoft.com/office/drawing/2014/main" id="{82617013-AFA5-4AB5-B415-EBAFE0BB3C9D}"/>
+                <a16:creationId xmlns:a16="http://schemas.microsoft.com/office/drawing/2014/main" id="{40CC277D-BEFE-4362-9884-EC1DFE6AA588}"/>
               </a:ext>
             </a:extLst>
           </p:cNvPr>
@@ -7950,7 +7950,7 @@
           <p:cNvPr id="5" name="">
             <a:extLst xmlns:a="http://schemas.openxmlformats.org/drawingml/2006/main">
               <a:ext uri="{FF2B5EF4-FFF2-40B4-BE49-F238E27FC236}">
-                <a16:creationId xmlns:a16="http://schemas.microsoft.com/office/drawing/2014/main" id="{5100A29D-02A1-4634-A018-49B8790727DC}"/>
+                <a16:creationId xmlns:a16="http://schemas.microsoft.com/office/drawing/2014/main" id="{39AFD8D2-D426-4D32-99BE-4F6C1D90DF1E}"/>
               </a:ext>
             </a:extLst>
           </p:cNvPr>
@@ -8007,7 +8007,7 @@
           <p:cNvPr id="6" name="">
             <a:extLst xmlns:a="http://schemas.openxmlformats.org/drawingml/2006/main">
               <a:ext uri="{FF2B5EF4-FFF2-40B4-BE49-F238E27FC236}">
-                <a16:creationId xmlns:a16="http://schemas.microsoft.com/office/drawing/2014/main" id="{75AD71B6-6C47-451A-BC6B-D5712D7FA068}"/>
+                <a16:creationId xmlns:a16="http://schemas.microsoft.com/office/drawing/2014/main" id="{F7A41DE3-1CA6-4498-B236-912444C05F74}"/>
               </a:ext>
             </a:extLst>
           </p:cNvPr>
@@ -8064,7 +8064,7 @@
           <p:cNvPr id="7" name="">
             <a:extLst xmlns:a="http://schemas.openxmlformats.org/drawingml/2006/main">
               <a:ext uri="{FF2B5EF4-FFF2-40B4-BE49-F238E27FC236}">
-                <a16:creationId xmlns:a16="http://schemas.microsoft.com/office/drawing/2014/main" id="{16779F63-7F9F-4FFA-B34C-224B5703A54A}"/>
+                <a16:creationId xmlns:a16="http://schemas.microsoft.com/office/drawing/2014/main" id="{1D3379F6-6D6E-4E01-ABEB-4BD9888645D0}"/>
               </a:ext>
             </a:extLst>
           </p:cNvPr>
@@ -8096,7 +8096,7 @@
           <p:cNvPr id="8" name="">
             <a:extLst xmlns:a="http://schemas.openxmlformats.org/drawingml/2006/main">
               <a:ext uri="{FF2B5EF4-FFF2-40B4-BE49-F238E27FC236}">
-                <a16:creationId xmlns:a16="http://schemas.microsoft.com/office/drawing/2014/main" id="{B4D4E77A-9ADC-43EA-8878-9CFDCF019A82}"/>
+                <a16:creationId xmlns:a16="http://schemas.microsoft.com/office/drawing/2014/main" id="{DA6CA179-D7CF-4F20-9101-54EE76D9F987}"/>
               </a:ext>
             </a:extLst>
           </p:cNvPr>
@@ -8153,7 +8153,7 @@
           <p:cNvPr id="9" name="">
             <a:extLst xmlns:a="http://schemas.openxmlformats.org/drawingml/2006/main">
               <a:ext uri="{FF2B5EF4-FFF2-40B4-BE49-F238E27FC236}">
-                <a16:creationId xmlns:a16="http://schemas.microsoft.com/office/drawing/2014/main" id="{1212BBBB-35D8-4056-9640-D9CEEB07DC49}"/>
+                <a16:creationId xmlns:a16="http://schemas.microsoft.com/office/drawing/2014/main" id="{64B054DD-CD51-4345-9400-F9FFA06524DA}"/>
               </a:ext>
             </a:extLst>
           </p:cNvPr>
@@ -8210,19 +8210,19 @@
           <p:cNvPr id="10" name="">
             <a:extLst xmlns:a="http://schemas.openxmlformats.org/drawingml/2006/main">
               <a:ext uri="{FF2B5EF4-FFF2-40B4-BE49-F238E27FC236}">
-                <a16:creationId xmlns:a16="http://schemas.microsoft.com/office/drawing/2014/main" id="{66EEEC6E-F54B-4451-83EA-C197C87D2915}"/>
-              </a:ext>
-            </a:extLst>
-          </p:cNvPr>
-          <p:cNvSpPr>
-            <a:spLocks xmlns:a="http://schemas.openxmlformats.org/drawingml/2006/main" noGrp="1"/>
-          </p:cNvSpPr>
-          <p:nvPr/>
-        </p:nvSpPr>
-        <p:spPr>
-          <a:xfrm xmlns:a="http://schemas.openxmlformats.org/drawingml/2006/main">
-            <a:off x="914400" y="1257300"/>
-            <a:ext cx="10363200" cy="781050"/>
+                <a16:creationId xmlns:a16="http://schemas.microsoft.com/office/drawing/2014/main" id="{5750C641-17FB-49E9-991B-676C246C4CAE}"/>
+              </a:ext>
+            </a:extLst>
+          </p:cNvPr>
+          <p:cNvSpPr>
+            <a:spLocks xmlns:a="http://schemas.openxmlformats.org/drawingml/2006/main" noGrp="1"/>
+          </p:cNvSpPr>
+          <p:nvPr/>
+        </p:nvSpPr>
+        <p:spPr>
+          <a:xfrm xmlns:a="http://schemas.openxmlformats.org/drawingml/2006/main">
+            <a:off x="857250" y="1219200"/>
+            <a:ext cx="10477500" cy="742950"/>
           </a:xfrm>
           <a:prstGeom xmlns:a="http://schemas.openxmlformats.org/drawingml/2006/main" prst="rect">
             <a:avLst/>
@@ -8239,7 +8239,7 @@
           <a:lstStyle xmlns:a="http://schemas.openxmlformats.org/drawingml/2006/main"/>
           <a:p xmlns:a="http://schemas.openxmlformats.org/drawingml/2006/main">
             <a:pPr algn="ctr">
-              <a:defRPr sz="2175" b="1">
+              <a:defRPr sz="2100" b="1">
                 <a:solidFill>
                   <a:srgbClr val="17253A"/>
                 </a:solidFill>
@@ -8249,7 +8249,7 @@
               </a:defRPr>
             </a:pPr>
             <a:r>
-              <a:rPr sz="2175" b="1">
+              <a:rPr sz="2100" b="1">
                 <a:solidFill>
                   <a:srgbClr val="17253A"/>
                 </a:solidFill>
@@ -8267,28 +8267,30 @@
           <p:cNvPr id="11" name="">
             <a:extLst xmlns:a="http://schemas.openxmlformats.org/drawingml/2006/main">
               <a:ext uri="{FF2B5EF4-FFF2-40B4-BE49-F238E27FC236}">
-                <a16:creationId xmlns:a16="http://schemas.microsoft.com/office/drawing/2014/main" id="{7B6DDB02-B558-4A72-B806-CE6B5DEE9842}"/>
-              </a:ext>
-            </a:extLst>
-          </p:cNvPr>
-          <p:cNvSpPr>
-            <a:spLocks xmlns:a="http://schemas.openxmlformats.org/drawingml/2006/main" noGrp="1"/>
-          </p:cNvSpPr>
-          <p:nvPr/>
-        </p:nvSpPr>
-        <p:spPr>
-          <a:xfrm xmlns:a="http://schemas.openxmlformats.org/drawingml/2006/main">
-            <a:off x="1000125" y="2247900"/>
-            <a:ext cx="476250" cy="476250"/>
-          </a:xfrm>
-          <a:prstGeom xmlns:a="http://schemas.openxmlformats.org/drawingml/2006/main" prst="ellipse">
+                <a16:creationId xmlns:a16="http://schemas.microsoft.com/office/drawing/2014/main" id="{CB6B06C3-7FA8-4FEE-9D9F-25FA1CDCF8AB}"/>
+              </a:ext>
+            </a:extLst>
+          </p:cNvPr>
+          <p:cNvSpPr>
+            <a:spLocks xmlns:a="http://schemas.openxmlformats.org/drawingml/2006/main" noGrp="1"/>
+          </p:cNvSpPr>
+          <p:nvPr/>
+        </p:nvSpPr>
+        <p:spPr>
+          <a:xfrm xmlns:a="http://schemas.openxmlformats.org/drawingml/2006/main">
+            <a:off x="971550" y="2124075"/>
+            <a:ext cx="38100" cy="3524250"/>
+          </a:xfrm>
+          <a:prstGeom xmlns:a="http://schemas.openxmlformats.org/drawingml/2006/main" prst="rect">
             <a:avLst/>
           </a:prstGeom>
           <a:solidFill xmlns:a="http://schemas.openxmlformats.org/drawingml/2006/main">
-            <a:srgbClr val="18324A"/>
+            <a:srgbClr val="2C6E73"/>
           </a:solidFill>
           <a:ln xmlns:a="http://schemas.openxmlformats.org/drawingml/2006/main" w="0">
-            <a:noFill/>
+            <a:solidFill>
+              <a:srgbClr val="2C6E73"/>
+            </a:solidFill>
           </a:ln>
         </p:spPr>
       </p:sp>
@@ -8297,19 +8299,19 @@
           <p:cNvPr id="12" name="">
             <a:extLst xmlns:a="http://schemas.openxmlformats.org/drawingml/2006/main">
               <a:ext uri="{FF2B5EF4-FFF2-40B4-BE49-F238E27FC236}">
-                <a16:creationId xmlns:a16="http://schemas.microsoft.com/office/drawing/2014/main" id="{09693DD4-48ED-4201-8325-BD0008552774}"/>
-              </a:ext>
-            </a:extLst>
-          </p:cNvPr>
-          <p:cNvSpPr>
-            <a:spLocks xmlns:a="http://schemas.openxmlformats.org/drawingml/2006/main" noGrp="1"/>
-          </p:cNvSpPr>
-          <p:nvPr/>
-        </p:nvSpPr>
-        <p:spPr>
-          <a:xfrm xmlns:a="http://schemas.openxmlformats.org/drawingml/2006/main">
-            <a:off x="1000125" y="2276475"/>
-            <a:ext cx="476250" cy="419100"/>
+                <a16:creationId xmlns:a16="http://schemas.microsoft.com/office/drawing/2014/main" id="{6359D40D-C6D3-434D-B009-502AEFB59FFE}"/>
+              </a:ext>
+            </a:extLst>
+          </p:cNvPr>
+          <p:cNvSpPr>
+            <a:spLocks xmlns:a="http://schemas.openxmlformats.org/drawingml/2006/main" noGrp="1"/>
+          </p:cNvSpPr>
+          <p:nvPr/>
+        </p:nvSpPr>
+        <p:spPr>
+          <a:xfrm xmlns:a="http://schemas.openxmlformats.org/drawingml/2006/main">
+            <a:off x="1162050" y="2200275"/>
+            <a:ext cx="400050" cy="400050"/>
           </a:xfrm>
           <a:prstGeom xmlns:a="http://schemas.openxmlformats.org/drawingml/2006/main" prst="rect">
             <a:avLst/>
@@ -8326,9 +8328,9 @@
           <a:lstStyle xmlns:a="http://schemas.openxmlformats.org/drawingml/2006/main"/>
           <a:p xmlns:a="http://schemas.openxmlformats.org/drawingml/2006/main">
             <a:pPr algn="ctr">
-              <a:defRPr sz="1350" b="1">
-                <a:solidFill>
-                  <a:srgbClr val="FFFFFF"/>
+              <a:defRPr sz="1125" b="1">
+                <a:solidFill>
+                  <a:srgbClr val="2C6E73"/>
                 </a:solidFill>
                 <a:latin typeface="Arial"/>
                 <a:ea typeface="Arial"/>
@@ -8336,9 +8338,9 @@
               </a:defRPr>
             </a:pPr>
             <a:r>
-              <a:rPr sz="1350" b="1">
-                <a:solidFill>
-                  <a:srgbClr val="FFFFFF"/>
+              <a:rPr sz="1125" b="1">
+                <a:solidFill>
+                  <a:srgbClr val="2C6E73"/>
                 </a:solidFill>
                 <a:latin typeface="Arial"/>
                 <a:ea typeface="Arial"/>
@@ -8354,19 +8356,19 @@
           <p:cNvPr id="13" name="">
             <a:extLst xmlns:a="http://schemas.openxmlformats.org/drawingml/2006/main">
               <a:ext uri="{FF2B5EF4-FFF2-40B4-BE49-F238E27FC236}">
-                <a16:creationId xmlns:a16="http://schemas.microsoft.com/office/drawing/2014/main" id="{49FA51E7-24F3-40A6-902F-E51A6F98CAD0}"/>
-              </a:ext>
-            </a:extLst>
-          </p:cNvPr>
-          <p:cNvSpPr>
-            <a:spLocks xmlns:a="http://schemas.openxmlformats.org/drawingml/2006/main" noGrp="1"/>
-          </p:cNvSpPr>
-          <p:nvPr/>
-        </p:nvSpPr>
-        <p:spPr>
-          <a:xfrm xmlns:a="http://schemas.openxmlformats.org/drawingml/2006/main">
-            <a:off x="1714500" y="2181225"/>
-            <a:ext cx="9429750" cy="609600"/>
+                <a16:creationId xmlns:a16="http://schemas.microsoft.com/office/drawing/2014/main" id="{7A706499-2727-4398-9FBC-9C5200E73F0F}"/>
+              </a:ext>
+            </a:extLst>
+          </p:cNvPr>
+          <p:cNvSpPr>
+            <a:spLocks xmlns:a="http://schemas.openxmlformats.org/drawingml/2006/main" noGrp="1"/>
+          </p:cNvSpPr>
+          <p:nvPr/>
+        </p:nvSpPr>
+        <p:spPr>
+          <a:xfrm xmlns:a="http://schemas.openxmlformats.org/drawingml/2006/main">
+            <a:off x="1714500" y="2114550"/>
+            <a:ext cx="9525000" cy="638175"/>
           </a:xfrm>
           <a:prstGeom xmlns:a="http://schemas.openxmlformats.org/drawingml/2006/main" prst="rect">
             <a:avLst/>
@@ -8383,7 +8385,7 @@
           <a:lstStyle xmlns:a="http://schemas.openxmlformats.org/drawingml/2006/main"/>
           <a:p xmlns:a="http://schemas.openxmlformats.org/drawingml/2006/main">
             <a:pPr algn="l">
-              <a:defRPr sz="1500" b="0">
+              <a:defRPr sz="1575" b="0">
                 <a:solidFill>
                   <a:srgbClr val="17253A"/>
                 </a:solidFill>
@@ -8393,7 +8395,7 @@
               </a:defRPr>
             </a:pPr>
             <a:r>
-              <a:rPr sz="1500" b="0">
+              <a:rPr sz="1575" b="0">
                 <a:solidFill>
                   <a:srgbClr val="17253A"/>
                 </a:solidFill>
@@ -8401,7 +8403,7 @@
                 <a:ea typeface="Arial"/>
                 <a:cs typeface="Arial"/>
               </a:rPr>
-              <a:t>Identify the structure: Find a useful percentage such as 10%, 5% or 1%.</a:t>
+              <a:t>17% of 650</a:t>
             </a:r>
           </a:p>
         </p:txBody>
@@ -8411,28 +8413,30 @@
           <p:cNvPr id="14" name="">
             <a:extLst xmlns:a="http://schemas.openxmlformats.org/drawingml/2006/main">
               <a:ext uri="{FF2B5EF4-FFF2-40B4-BE49-F238E27FC236}">
-                <a16:creationId xmlns:a16="http://schemas.microsoft.com/office/drawing/2014/main" id="{4E76571A-76E9-4427-9F5C-D600841FB56E}"/>
-              </a:ext>
-            </a:extLst>
-          </p:cNvPr>
-          <p:cNvSpPr>
-            <a:spLocks xmlns:a="http://schemas.openxmlformats.org/drawingml/2006/main" noGrp="1"/>
-          </p:cNvSpPr>
-          <p:nvPr/>
-        </p:nvSpPr>
-        <p:spPr>
-          <a:xfrm xmlns:a="http://schemas.openxmlformats.org/drawingml/2006/main">
-            <a:off x="1000125" y="2990850"/>
-            <a:ext cx="476250" cy="476250"/>
-          </a:xfrm>
-          <a:prstGeom xmlns:a="http://schemas.openxmlformats.org/drawingml/2006/main" prst="ellipse">
+                <a16:creationId xmlns:a16="http://schemas.microsoft.com/office/drawing/2014/main" id="{25E06039-7695-4B3C-B533-1F6DDE3C1DE5}"/>
+              </a:ext>
+            </a:extLst>
+          </p:cNvPr>
+          <p:cNvSpPr>
+            <a:spLocks xmlns:a="http://schemas.openxmlformats.org/drawingml/2006/main" noGrp="1"/>
+          </p:cNvSpPr>
+          <p:nvPr/>
+        </p:nvSpPr>
+        <p:spPr>
+          <a:xfrm xmlns:a="http://schemas.openxmlformats.org/drawingml/2006/main">
+            <a:off x="1714500" y="2771775"/>
+            <a:ext cx="9334500" cy="9525"/>
+          </a:xfrm>
+          <a:prstGeom xmlns:a="http://schemas.openxmlformats.org/drawingml/2006/main" prst="rect">
             <a:avLst/>
           </a:prstGeom>
           <a:solidFill xmlns:a="http://schemas.openxmlformats.org/drawingml/2006/main">
-            <a:srgbClr val="2C6E73"/>
+            <a:srgbClr val="D9E0E6"/>
           </a:solidFill>
           <a:ln xmlns:a="http://schemas.openxmlformats.org/drawingml/2006/main" w="0">
-            <a:noFill/>
+            <a:solidFill>
+              <a:srgbClr val="D9E0E6"/>
+            </a:solidFill>
           </a:ln>
         </p:spPr>
       </p:sp>
@@ -8441,19 +8445,19 @@
           <p:cNvPr id="15" name="">
             <a:extLst xmlns:a="http://schemas.openxmlformats.org/drawingml/2006/main">
               <a:ext uri="{FF2B5EF4-FFF2-40B4-BE49-F238E27FC236}">
-                <a16:creationId xmlns:a16="http://schemas.microsoft.com/office/drawing/2014/main" id="{18653F1C-66C6-48B2-950E-827BC0F5225E}"/>
-              </a:ext>
-            </a:extLst>
-          </p:cNvPr>
-          <p:cNvSpPr>
-            <a:spLocks xmlns:a="http://schemas.openxmlformats.org/drawingml/2006/main" noGrp="1"/>
-          </p:cNvSpPr>
-          <p:nvPr/>
-        </p:nvSpPr>
-        <p:spPr>
-          <a:xfrm xmlns:a="http://schemas.openxmlformats.org/drawingml/2006/main">
-            <a:off x="1000125" y="3019425"/>
-            <a:ext cx="476250" cy="419100"/>
+                <a16:creationId xmlns:a16="http://schemas.microsoft.com/office/drawing/2014/main" id="{55847440-B367-42E5-907F-EA3E8E420FA4}"/>
+              </a:ext>
+            </a:extLst>
+          </p:cNvPr>
+          <p:cNvSpPr>
+            <a:spLocks xmlns:a="http://schemas.openxmlformats.org/drawingml/2006/main" noGrp="1"/>
+          </p:cNvSpPr>
+          <p:nvPr/>
+        </p:nvSpPr>
+        <p:spPr>
+          <a:xfrm xmlns:a="http://schemas.openxmlformats.org/drawingml/2006/main">
+            <a:off x="1162050" y="2905125"/>
+            <a:ext cx="400050" cy="400050"/>
           </a:xfrm>
           <a:prstGeom xmlns:a="http://schemas.openxmlformats.org/drawingml/2006/main" prst="rect">
             <a:avLst/>
@@ -8470,9 +8474,9 @@
           <a:lstStyle xmlns:a="http://schemas.openxmlformats.org/drawingml/2006/main"/>
           <a:p xmlns:a="http://schemas.openxmlformats.org/drawingml/2006/main">
             <a:pPr algn="ctr">
-              <a:defRPr sz="1350" b="1">
-                <a:solidFill>
-                  <a:srgbClr val="FFFFFF"/>
+              <a:defRPr sz="1125" b="1">
+                <a:solidFill>
+                  <a:srgbClr val="2C6E73"/>
                 </a:solidFill>
                 <a:latin typeface="Arial"/>
                 <a:ea typeface="Arial"/>
@@ -8480,9 +8484,9 @@
               </a:defRPr>
             </a:pPr>
             <a:r>
-              <a:rPr sz="1350" b="1">
-                <a:solidFill>
-                  <a:srgbClr val="FFFFFF"/>
+              <a:rPr sz="1125" b="1">
+                <a:solidFill>
+                  <a:srgbClr val="2C6E73"/>
                 </a:solidFill>
                 <a:latin typeface="Arial"/>
                 <a:ea typeface="Arial"/>
@@ -8498,19 +8502,19 @@
           <p:cNvPr id="16" name="">
             <a:extLst xmlns:a="http://schemas.openxmlformats.org/drawingml/2006/main">
               <a:ext uri="{FF2B5EF4-FFF2-40B4-BE49-F238E27FC236}">
-                <a16:creationId xmlns:a16="http://schemas.microsoft.com/office/drawing/2014/main" id="{B4D1A823-2A90-45AF-97E0-FBC417257E3D}"/>
-              </a:ext>
-            </a:extLst>
-          </p:cNvPr>
-          <p:cNvSpPr>
-            <a:spLocks xmlns:a="http://schemas.openxmlformats.org/drawingml/2006/main" noGrp="1"/>
-          </p:cNvSpPr>
-          <p:nvPr/>
-        </p:nvSpPr>
-        <p:spPr>
-          <a:xfrm xmlns:a="http://schemas.openxmlformats.org/drawingml/2006/main">
-            <a:off x="1714500" y="2924175"/>
-            <a:ext cx="9429750" cy="609600"/>
+                <a16:creationId xmlns:a16="http://schemas.microsoft.com/office/drawing/2014/main" id="{0194E423-2B5C-4D13-B919-F46E981382FB}"/>
+              </a:ext>
+            </a:extLst>
+          </p:cNvPr>
+          <p:cNvSpPr>
+            <a:spLocks xmlns:a="http://schemas.openxmlformats.org/drawingml/2006/main" noGrp="1"/>
+          </p:cNvSpPr>
+          <p:nvPr/>
+        </p:nvSpPr>
+        <p:spPr>
+          <a:xfrm xmlns:a="http://schemas.openxmlformats.org/drawingml/2006/main">
+            <a:off x="1714500" y="2819400"/>
+            <a:ext cx="9525000" cy="638175"/>
           </a:xfrm>
           <a:prstGeom xmlns:a="http://schemas.openxmlformats.org/drawingml/2006/main" prst="rect">
             <a:avLst/>
@@ -8527,7 +8531,7 @@
           <a:lstStyle xmlns:a="http://schemas.openxmlformats.org/drawingml/2006/main"/>
           <a:p xmlns:a="http://schemas.openxmlformats.org/drawingml/2006/main">
             <a:pPr algn="l">
-              <a:defRPr sz="1500" b="0">
+              <a:defRPr sz="1575" b="0">
                 <a:solidFill>
                   <a:srgbClr val="17253A"/>
                 </a:solidFill>
@@ -8537,7 +8541,7 @@
               </a:defRPr>
             </a:pPr>
             <a:r>
-              <a:rPr sz="1500" b="0">
+              <a:rPr sz="1575" b="0">
                 <a:solidFill>
                   <a:srgbClr val="17253A"/>
                 </a:solidFill>
@@ -8545,7 +8549,7 @@
                 <a:ea typeface="Arial"/>
                 <a:cs typeface="Arial"/>
               </a:rPr>
-              <a:t>Set up the method: Combine or scale the known percentage to reach the required value.</a:t>
+              <a:t>10% = 65     5% = 32.5</a:t>
             </a:r>
           </a:p>
         </p:txBody>
@@ -8555,28 +8559,30 @@
           <p:cNvPr id="17" name="">
             <a:extLst xmlns:a="http://schemas.openxmlformats.org/drawingml/2006/main">
               <a:ext uri="{FF2B5EF4-FFF2-40B4-BE49-F238E27FC236}">
-                <a16:creationId xmlns:a16="http://schemas.microsoft.com/office/drawing/2014/main" id="{88C32DF2-3091-4FBD-B955-3334327E17D6}"/>
-              </a:ext>
-            </a:extLst>
-          </p:cNvPr>
-          <p:cNvSpPr>
-            <a:spLocks xmlns:a="http://schemas.openxmlformats.org/drawingml/2006/main" noGrp="1"/>
-          </p:cNvSpPr>
-          <p:nvPr/>
-        </p:nvSpPr>
-        <p:spPr>
-          <a:xfrm xmlns:a="http://schemas.openxmlformats.org/drawingml/2006/main">
-            <a:off x="1000125" y="3733800"/>
-            <a:ext cx="476250" cy="476250"/>
-          </a:xfrm>
-          <a:prstGeom xmlns:a="http://schemas.openxmlformats.org/drawingml/2006/main" prst="ellipse">
+                <a16:creationId xmlns:a16="http://schemas.microsoft.com/office/drawing/2014/main" id="{4AD3A358-E4AC-4949-9B1B-00835BF4A615}"/>
+              </a:ext>
+            </a:extLst>
+          </p:cNvPr>
+          <p:cNvSpPr>
+            <a:spLocks xmlns:a="http://schemas.openxmlformats.org/drawingml/2006/main" noGrp="1"/>
+          </p:cNvSpPr>
+          <p:nvPr/>
+        </p:nvSpPr>
+        <p:spPr>
+          <a:xfrm xmlns:a="http://schemas.openxmlformats.org/drawingml/2006/main">
+            <a:off x="1714500" y="3476625"/>
+            <a:ext cx="9334500" cy="9525"/>
+          </a:xfrm>
+          <a:prstGeom xmlns:a="http://schemas.openxmlformats.org/drawingml/2006/main" prst="rect">
             <a:avLst/>
           </a:prstGeom>
           <a:solidFill xmlns:a="http://schemas.openxmlformats.org/drawingml/2006/main">
-            <a:srgbClr val="2C6E73"/>
+            <a:srgbClr val="D9E0E6"/>
           </a:solidFill>
           <a:ln xmlns:a="http://schemas.openxmlformats.org/drawingml/2006/main" w="0">
-            <a:noFill/>
+            <a:solidFill>
+              <a:srgbClr val="D9E0E6"/>
+            </a:solidFill>
           </a:ln>
         </p:spPr>
       </p:sp>
@@ -8585,19 +8591,19 @@
           <p:cNvPr id="18" name="">
             <a:extLst xmlns:a="http://schemas.openxmlformats.org/drawingml/2006/main">
               <a:ext uri="{FF2B5EF4-FFF2-40B4-BE49-F238E27FC236}">
-                <a16:creationId xmlns:a16="http://schemas.microsoft.com/office/drawing/2014/main" id="{26E8623F-0089-4A9D-BB7E-B79464CDB2EB}"/>
-              </a:ext>
-            </a:extLst>
-          </p:cNvPr>
-          <p:cNvSpPr>
-            <a:spLocks xmlns:a="http://schemas.openxmlformats.org/drawingml/2006/main" noGrp="1"/>
-          </p:cNvSpPr>
-          <p:nvPr/>
-        </p:nvSpPr>
-        <p:spPr>
-          <a:xfrm xmlns:a="http://schemas.openxmlformats.org/drawingml/2006/main">
-            <a:off x="1000125" y="3762375"/>
-            <a:ext cx="476250" cy="419100"/>
+                <a16:creationId xmlns:a16="http://schemas.microsoft.com/office/drawing/2014/main" id="{AF7255D5-5420-4997-B67E-7DF810E2C061}"/>
+              </a:ext>
+            </a:extLst>
+          </p:cNvPr>
+          <p:cNvSpPr>
+            <a:spLocks xmlns:a="http://schemas.openxmlformats.org/drawingml/2006/main" noGrp="1"/>
+          </p:cNvSpPr>
+          <p:nvPr/>
+        </p:nvSpPr>
+        <p:spPr>
+          <a:xfrm xmlns:a="http://schemas.openxmlformats.org/drawingml/2006/main">
+            <a:off x="1162050" y="3609975"/>
+            <a:ext cx="400050" cy="400050"/>
           </a:xfrm>
           <a:prstGeom xmlns:a="http://schemas.openxmlformats.org/drawingml/2006/main" prst="rect">
             <a:avLst/>
@@ -8614,9 +8620,9 @@
           <a:lstStyle xmlns:a="http://schemas.openxmlformats.org/drawingml/2006/main"/>
           <a:p xmlns:a="http://schemas.openxmlformats.org/drawingml/2006/main">
             <a:pPr algn="ctr">
-              <a:defRPr sz="1350" b="1">
-                <a:solidFill>
-                  <a:srgbClr val="FFFFFF"/>
+              <a:defRPr sz="1125" b="1">
+                <a:solidFill>
+                  <a:srgbClr val="2C6E73"/>
                 </a:solidFill>
                 <a:latin typeface="Arial"/>
                 <a:ea typeface="Arial"/>
@@ -8624,9 +8630,9 @@
               </a:defRPr>
             </a:pPr>
             <a:r>
-              <a:rPr sz="1350" b="1">
-                <a:solidFill>
-                  <a:srgbClr val="FFFFFF"/>
+              <a:rPr sz="1125" b="1">
+                <a:solidFill>
+                  <a:srgbClr val="2C6E73"/>
                 </a:solidFill>
                 <a:latin typeface="Arial"/>
                 <a:ea typeface="Arial"/>
@@ -8642,19 +8648,19 @@
           <p:cNvPr id="19" name="">
             <a:extLst xmlns:a="http://schemas.openxmlformats.org/drawingml/2006/main">
               <a:ext uri="{FF2B5EF4-FFF2-40B4-BE49-F238E27FC236}">
-                <a16:creationId xmlns:a16="http://schemas.microsoft.com/office/drawing/2014/main" id="{FC19CAE1-4854-4D26-9F6F-0A92F40A4875}"/>
-              </a:ext>
-            </a:extLst>
-          </p:cNvPr>
-          <p:cNvSpPr>
-            <a:spLocks xmlns:a="http://schemas.openxmlformats.org/drawingml/2006/main" noGrp="1"/>
-          </p:cNvSpPr>
-          <p:nvPr/>
-        </p:nvSpPr>
-        <p:spPr>
-          <a:xfrm xmlns:a="http://schemas.openxmlformats.org/drawingml/2006/main">
-            <a:off x="1714500" y="3667125"/>
-            <a:ext cx="9429750" cy="609600"/>
+                <a16:creationId xmlns:a16="http://schemas.microsoft.com/office/drawing/2014/main" id="{29B54B21-F6F6-4BA2-842D-BFF1B76CC823}"/>
+              </a:ext>
+            </a:extLst>
+          </p:cNvPr>
+          <p:cNvSpPr>
+            <a:spLocks xmlns:a="http://schemas.openxmlformats.org/drawingml/2006/main" noGrp="1"/>
+          </p:cNvSpPr>
+          <p:nvPr/>
+        </p:nvSpPr>
+        <p:spPr>
+          <a:xfrm xmlns:a="http://schemas.openxmlformats.org/drawingml/2006/main">
+            <a:off x="1714500" y="3524250"/>
+            <a:ext cx="9525000" cy="638175"/>
           </a:xfrm>
           <a:prstGeom xmlns:a="http://schemas.openxmlformats.org/drawingml/2006/main" prst="rect">
             <a:avLst/>
@@ -8671,7 +8677,7 @@
           <a:lstStyle xmlns:a="http://schemas.openxmlformats.org/drawingml/2006/main"/>
           <a:p xmlns:a="http://schemas.openxmlformats.org/drawingml/2006/main">
             <a:pPr algn="l">
-              <a:defRPr sz="1500" b="0">
+              <a:defRPr sz="1575" b="0">
                 <a:solidFill>
                   <a:srgbClr val="17253A"/>
                 </a:solidFill>
@@ -8681,7 +8687,7 @@
               </a:defRPr>
             </a:pPr>
             <a:r>
-              <a:rPr sz="1500" b="0">
+              <a:rPr sz="1575" b="0">
                 <a:solidFill>
                   <a:srgbClr val="17253A"/>
                 </a:solidFill>
@@ -8689,7 +8695,7 @@
                 <a:ea typeface="Arial"/>
                 <a:cs typeface="Arial"/>
               </a:rPr>
-              <a:t>Complete the calculation: 110.5.</a:t>
+              <a:t>2% = 13</a:t>
             </a:r>
           </a:p>
         </p:txBody>
@@ -8699,28 +8705,30 @@
           <p:cNvPr id="20" name="">
             <a:extLst xmlns:a="http://schemas.openxmlformats.org/drawingml/2006/main">
               <a:ext uri="{FF2B5EF4-FFF2-40B4-BE49-F238E27FC236}">
-                <a16:creationId xmlns:a16="http://schemas.microsoft.com/office/drawing/2014/main" id="{0B5228F5-5158-4583-B216-5129375D473D}"/>
-              </a:ext>
-            </a:extLst>
-          </p:cNvPr>
-          <p:cNvSpPr>
-            <a:spLocks xmlns:a="http://schemas.openxmlformats.org/drawingml/2006/main" noGrp="1"/>
-          </p:cNvSpPr>
-          <p:nvPr/>
-        </p:nvSpPr>
-        <p:spPr>
-          <a:xfrm xmlns:a="http://schemas.openxmlformats.org/drawingml/2006/main">
-            <a:off x="1000125" y="4476750"/>
-            <a:ext cx="476250" cy="476250"/>
-          </a:xfrm>
-          <a:prstGeom xmlns:a="http://schemas.openxmlformats.org/drawingml/2006/main" prst="ellipse">
+                <a16:creationId xmlns:a16="http://schemas.microsoft.com/office/drawing/2014/main" id="{5BFDA291-7DB2-4A7D-9515-174A54DE7114}"/>
+              </a:ext>
+            </a:extLst>
+          </p:cNvPr>
+          <p:cNvSpPr>
+            <a:spLocks xmlns:a="http://schemas.openxmlformats.org/drawingml/2006/main" noGrp="1"/>
+          </p:cNvSpPr>
+          <p:nvPr/>
+        </p:nvSpPr>
+        <p:spPr>
+          <a:xfrm xmlns:a="http://schemas.openxmlformats.org/drawingml/2006/main">
+            <a:off x="1714500" y="4181475"/>
+            <a:ext cx="9334500" cy="9525"/>
+          </a:xfrm>
+          <a:prstGeom xmlns:a="http://schemas.openxmlformats.org/drawingml/2006/main" prst="rect">
             <a:avLst/>
           </a:prstGeom>
           <a:solidFill xmlns:a="http://schemas.openxmlformats.org/drawingml/2006/main">
-            <a:srgbClr val="2C6E73"/>
+            <a:srgbClr val="D9E0E6"/>
           </a:solidFill>
           <a:ln xmlns:a="http://schemas.openxmlformats.org/drawingml/2006/main" w="0">
-            <a:noFill/>
+            <a:solidFill>
+              <a:srgbClr val="D9E0E6"/>
+            </a:solidFill>
           </a:ln>
         </p:spPr>
       </p:sp>
@@ -8729,19 +8737,19 @@
           <p:cNvPr id="21" name="">
             <a:extLst xmlns:a="http://schemas.openxmlformats.org/drawingml/2006/main">
               <a:ext uri="{FF2B5EF4-FFF2-40B4-BE49-F238E27FC236}">
-                <a16:creationId xmlns:a16="http://schemas.microsoft.com/office/drawing/2014/main" id="{70FE304E-A3FA-4530-B47B-3636ADA5B9F4}"/>
-              </a:ext>
-            </a:extLst>
-          </p:cNvPr>
-          <p:cNvSpPr>
-            <a:spLocks xmlns:a="http://schemas.openxmlformats.org/drawingml/2006/main" noGrp="1"/>
-          </p:cNvSpPr>
-          <p:nvPr/>
-        </p:nvSpPr>
-        <p:spPr>
-          <a:xfrm xmlns:a="http://schemas.openxmlformats.org/drawingml/2006/main">
-            <a:off x="1000125" y="4505325"/>
-            <a:ext cx="476250" cy="419100"/>
+                <a16:creationId xmlns:a16="http://schemas.microsoft.com/office/drawing/2014/main" id="{2FD45D51-A0D4-474D-9D8D-B5DC081E6B4C}"/>
+              </a:ext>
+            </a:extLst>
+          </p:cNvPr>
+          <p:cNvSpPr>
+            <a:spLocks xmlns:a="http://schemas.openxmlformats.org/drawingml/2006/main" noGrp="1"/>
+          </p:cNvSpPr>
+          <p:nvPr/>
+        </p:nvSpPr>
+        <p:spPr>
+          <a:xfrm xmlns:a="http://schemas.openxmlformats.org/drawingml/2006/main">
+            <a:off x="1162050" y="4314825"/>
+            <a:ext cx="400050" cy="400050"/>
           </a:xfrm>
           <a:prstGeom xmlns:a="http://schemas.openxmlformats.org/drawingml/2006/main" prst="rect">
             <a:avLst/>
@@ -8758,9 +8766,9 @@
           <a:lstStyle xmlns:a="http://schemas.openxmlformats.org/drawingml/2006/main"/>
           <a:p xmlns:a="http://schemas.openxmlformats.org/drawingml/2006/main">
             <a:pPr algn="ctr">
-              <a:defRPr sz="1350" b="1">
-                <a:solidFill>
-                  <a:srgbClr val="FFFFFF"/>
+              <a:defRPr sz="1125" b="1">
+                <a:solidFill>
+                  <a:srgbClr val="2C6E73"/>
                 </a:solidFill>
                 <a:latin typeface="Arial"/>
                 <a:ea typeface="Arial"/>
@@ -8768,9 +8776,9 @@
               </a:defRPr>
             </a:pPr>
             <a:r>
-              <a:rPr sz="1350" b="1">
-                <a:solidFill>
-                  <a:srgbClr val="FFFFFF"/>
+              <a:rPr sz="1125" b="1">
+                <a:solidFill>
+                  <a:srgbClr val="2C6E73"/>
                 </a:solidFill>
                 <a:latin typeface="Arial"/>
                 <a:ea typeface="Arial"/>
@@ -8786,19 +8794,19 @@
           <p:cNvPr id="22" name="">
             <a:extLst xmlns:a="http://schemas.openxmlformats.org/drawingml/2006/main">
               <a:ext uri="{FF2B5EF4-FFF2-40B4-BE49-F238E27FC236}">
-                <a16:creationId xmlns:a16="http://schemas.microsoft.com/office/drawing/2014/main" id="{604BEB09-F42F-4285-BD19-95B244212E39}"/>
-              </a:ext>
-            </a:extLst>
-          </p:cNvPr>
-          <p:cNvSpPr>
-            <a:spLocks xmlns:a="http://schemas.openxmlformats.org/drawingml/2006/main" noGrp="1"/>
-          </p:cNvSpPr>
-          <p:nvPr/>
-        </p:nvSpPr>
-        <p:spPr>
-          <a:xfrm xmlns:a="http://schemas.openxmlformats.org/drawingml/2006/main">
-            <a:off x="1714500" y="4410075"/>
-            <a:ext cx="9429750" cy="609600"/>
+                <a16:creationId xmlns:a16="http://schemas.microsoft.com/office/drawing/2014/main" id="{059C9857-5BFB-4DC7-ADD8-9CFD0609A337}"/>
+              </a:ext>
+            </a:extLst>
+          </p:cNvPr>
+          <p:cNvSpPr>
+            <a:spLocks xmlns:a="http://schemas.openxmlformats.org/drawingml/2006/main" noGrp="1"/>
+          </p:cNvSpPr>
+          <p:nvPr/>
+        </p:nvSpPr>
+        <p:spPr>
+          <a:xfrm xmlns:a="http://schemas.openxmlformats.org/drawingml/2006/main">
+            <a:off x="1714500" y="4229100"/>
+            <a:ext cx="9525000" cy="638175"/>
           </a:xfrm>
           <a:prstGeom xmlns:a="http://schemas.openxmlformats.org/drawingml/2006/main" prst="rect">
             <a:avLst/>
@@ -8815,9 +8823,9 @@
           <a:lstStyle xmlns:a="http://schemas.openxmlformats.org/drawingml/2006/main"/>
           <a:p xmlns:a="http://schemas.openxmlformats.org/drawingml/2006/main">
             <a:pPr algn="l">
-              <a:defRPr sz="1500" b="1">
-                <a:solidFill>
-                  <a:srgbClr val="2F785D"/>
+              <a:defRPr sz="1575" b="0">
+                <a:solidFill>
+                  <a:srgbClr val="17253A"/>
                 </a:solidFill>
                 <a:latin typeface="Arial"/>
                 <a:ea typeface="Arial"/>
@@ -8825,15 +8833,161 @@
               </a:defRPr>
             </a:pPr>
             <a:r>
-              <a:rPr sz="1500" b="1">
+              <a:rPr sz="1575" b="0">
+                <a:solidFill>
+                  <a:srgbClr val="17253A"/>
+                </a:solidFill>
+                <a:latin typeface="Arial"/>
+                <a:ea typeface="Arial"/>
+                <a:cs typeface="Arial"/>
+              </a:rPr>
+              <a:t>65 + 32.5 + 13</a:t>
+            </a:r>
+          </a:p>
+        </p:txBody>
+      </p:sp>
+      <p:sp>
+        <p:nvSpPr>
+          <p:cNvPr id="23" name="">
+            <a:extLst xmlns:a="http://schemas.openxmlformats.org/drawingml/2006/main">
+              <a:ext uri="{FF2B5EF4-FFF2-40B4-BE49-F238E27FC236}">
+                <a16:creationId xmlns:a16="http://schemas.microsoft.com/office/drawing/2014/main" id="{D39F1E0A-DC3B-4B1D-B8F9-7D1A01110E41}"/>
+              </a:ext>
+            </a:extLst>
+          </p:cNvPr>
+          <p:cNvSpPr>
+            <a:spLocks xmlns:a="http://schemas.openxmlformats.org/drawingml/2006/main" noGrp="1"/>
+          </p:cNvSpPr>
+          <p:nvPr/>
+        </p:nvSpPr>
+        <p:spPr>
+          <a:xfrm xmlns:a="http://schemas.openxmlformats.org/drawingml/2006/main">
+            <a:off x="1714500" y="4886325"/>
+            <a:ext cx="9334500" cy="9525"/>
+          </a:xfrm>
+          <a:prstGeom xmlns:a="http://schemas.openxmlformats.org/drawingml/2006/main" prst="rect">
+            <a:avLst/>
+          </a:prstGeom>
+          <a:solidFill xmlns:a="http://schemas.openxmlformats.org/drawingml/2006/main">
+            <a:srgbClr val="D9E0E6"/>
+          </a:solidFill>
+          <a:ln xmlns:a="http://schemas.openxmlformats.org/drawingml/2006/main" w="0">
+            <a:solidFill>
+              <a:srgbClr val="D9E0E6"/>
+            </a:solidFill>
+          </a:ln>
+        </p:spPr>
+      </p:sp>
+      <p:sp>
+        <p:nvSpPr>
+          <p:cNvPr id="24" name="">
+            <a:extLst xmlns:a="http://schemas.openxmlformats.org/drawingml/2006/main">
+              <a:ext uri="{FF2B5EF4-FFF2-40B4-BE49-F238E27FC236}">
+                <a16:creationId xmlns:a16="http://schemas.microsoft.com/office/drawing/2014/main" id="{8A3B35DB-BA64-47C5-81BE-1CEE59D31F35}"/>
+              </a:ext>
+            </a:extLst>
+          </p:cNvPr>
+          <p:cNvSpPr>
+            <a:spLocks xmlns:a="http://schemas.openxmlformats.org/drawingml/2006/main" noGrp="1"/>
+          </p:cNvSpPr>
+          <p:nvPr/>
+        </p:nvSpPr>
+        <p:spPr>
+          <a:xfrm xmlns:a="http://schemas.openxmlformats.org/drawingml/2006/main">
+            <a:off x="1162050" y="5019675"/>
+            <a:ext cx="400050" cy="400050"/>
+          </a:xfrm>
+          <a:prstGeom xmlns:a="http://schemas.openxmlformats.org/drawingml/2006/main" prst="rect">
+            <a:avLst/>
+          </a:prstGeom>
+          <a:noFill xmlns:a="http://schemas.openxmlformats.org/drawingml/2006/main"/>
+          <a:ln xmlns:a="http://schemas.openxmlformats.org/drawingml/2006/main" w="0">
+            <a:noFill/>
+          </a:ln>
+        </p:spPr>
+        <p:txBody>
+          <a:bodyPr xmlns:a="http://schemas.openxmlformats.org/drawingml/2006/main" anchor="ctr">
+            <a:normAutofit fontScale="100000"/>
+          </a:bodyPr>
+          <a:lstStyle xmlns:a="http://schemas.openxmlformats.org/drawingml/2006/main"/>
+          <a:p xmlns:a="http://schemas.openxmlformats.org/drawingml/2006/main">
+            <a:pPr algn="ctr">
+              <a:defRPr sz="1125" b="1">
                 <a:solidFill>
                   <a:srgbClr val="2F785D"/>
                 </a:solidFill>
                 <a:latin typeface="Arial"/>
                 <a:ea typeface="Arial"/>
                 <a:cs typeface="Arial"/>
+              </a:defRPr>
+            </a:pPr>
+            <a:r>
+              <a:rPr sz="1125" b="1">
+                <a:solidFill>
+                  <a:srgbClr val="2F785D"/>
+                </a:solidFill>
+                <a:latin typeface="Arial"/>
+                <a:ea typeface="Arial"/>
+                <a:cs typeface="Arial"/>
               </a:rPr>
-              <a:t>Check the result: Check the result against the whole amount and context.</a:t>
+              <a:t>5</a:t>
+            </a:r>
+          </a:p>
+        </p:txBody>
+      </p:sp>
+      <p:sp>
+        <p:nvSpPr>
+          <p:cNvPr id="25" name="">
+            <a:extLst xmlns:a="http://schemas.openxmlformats.org/drawingml/2006/main">
+              <a:ext uri="{FF2B5EF4-FFF2-40B4-BE49-F238E27FC236}">
+                <a16:creationId xmlns:a16="http://schemas.microsoft.com/office/drawing/2014/main" id="{D4E68A99-49D3-4375-AFAB-379105C6FE99}"/>
+              </a:ext>
+            </a:extLst>
+          </p:cNvPr>
+          <p:cNvSpPr>
+            <a:spLocks xmlns:a="http://schemas.openxmlformats.org/drawingml/2006/main" noGrp="1"/>
+          </p:cNvSpPr>
+          <p:nvPr/>
+        </p:nvSpPr>
+        <p:spPr>
+          <a:xfrm xmlns:a="http://schemas.openxmlformats.org/drawingml/2006/main">
+            <a:off x="1714500" y="4933950"/>
+            <a:ext cx="9525000" cy="638175"/>
+          </a:xfrm>
+          <a:prstGeom xmlns:a="http://schemas.openxmlformats.org/drawingml/2006/main" prst="rect">
+            <a:avLst/>
+          </a:prstGeom>
+          <a:noFill xmlns:a="http://schemas.openxmlformats.org/drawingml/2006/main"/>
+          <a:ln xmlns:a="http://schemas.openxmlformats.org/drawingml/2006/main" w="0">
+            <a:noFill/>
+          </a:ln>
+        </p:spPr>
+        <p:txBody>
+          <a:bodyPr xmlns:a="http://schemas.openxmlformats.org/drawingml/2006/main" anchor="ctr">
+            <a:normAutofit fontScale="100000"/>
+          </a:bodyPr>
+          <a:lstStyle xmlns:a="http://schemas.openxmlformats.org/drawingml/2006/main"/>
+          <a:p xmlns:a="http://schemas.openxmlformats.org/drawingml/2006/main">
+            <a:pPr algn="l">
+              <a:defRPr sz="1575" b="1">
+                <a:solidFill>
+                  <a:srgbClr val="2F785D"/>
+                </a:solidFill>
+                <a:latin typeface="Arial"/>
+                <a:ea typeface="Arial"/>
+                <a:cs typeface="Arial"/>
+              </a:defRPr>
+            </a:pPr>
+            <a:r>
+              <a:rPr sz="1575" b="1">
+                <a:solidFill>
+                  <a:srgbClr val="2F785D"/>
+                </a:solidFill>
+                <a:latin typeface="Arial"/>
+                <a:ea typeface="Arial"/>
+                <a:cs typeface="Arial"/>
+              </a:rPr>
+              <a:t>110.5</a:t>
             </a:r>
           </a:p>
         </p:txBody>
@@ -8841,7 +8995,7 @@
     </p:spTree>
     <p:extLst>
       <p:ext uri="{BB962C8B-B14F-4D97-AF65-F5344CB8AC3E}">
-        <p14:creationId xmlns:p14="http://schemas.microsoft.com/office/powerpoint/2010/main" val="237440017"/>
+        <p14:creationId xmlns:p14="http://schemas.microsoft.com/office/powerpoint/2010/main" val="1870250590"/>
       </p:ext>
     </p:extLst>
   </p:cSld>
@@ -9078,6 +9232,51 @@
                       </p:childTnLst>
                     </p:cTn>
                   </p:par>
+                  <p:par>
+                    <p:cTn id="23" fill="hold">
+                      <p:stCondLst>
+                        <p:cond delay="indefinite"/>
+                      </p:stCondLst>
+                      <p:childTnLst>
+                        <p:par>
+                          <p:cTn id="24" fill="hold">
+                            <p:stCondLst>
+                              <p:cond delay="0"/>
+                            </p:stCondLst>
+                            <p:childTnLst>
+                              <p:par>
+                                <p:cTn id="25" presetID="1" presetClass="entr" presetSubtype="0" fill="hold" grpId="0" nodeType="clickEffect">
+                                  <p:stCondLst>
+                                    <p:cond delay="0"/>
+                                  </p:stCondLst>
+                                  <p:childTnLst>
+                                    <p:set>
+                                      <p:cBhvr>
+                                        <p:cTn id="26" dur="1" fill="hold">
+                                          <p:stCondLst>
+                                            <p:cond delay="0"/>
+                                          </p:stCondLst>
+                                        </p:cTn>
+                                        <p:tgtEl>
+                                          <p:spTgt spid="25"/>
+                                        </p:tgtEl>
+                                        <p:attrNameLst>
+                                          <p:attrName>style.visibility</p:attrName>
+                                        </p:attrNameLst>
+                                      </p:cBhvr>
+                                      <p:to>
+                                        <p:strVal val="visible"/>
+                                      </p:to>
+                                    </p:set>
+                                  </p:childTnLst>
+                                </p:cTn>
+                              </p:par>
+                            </p:childTnLst>
+                          </p:cTn>
+                        </p:par>
+                      </p:childTnLst>
+                    </p:cTn>
+                  </p:par>
                 </p:childTnLst>
               </p:cTn>
               <p:prevCondLst>
@@ -9105,6 +9304,7 @@
       <p:bldP spid="16" grpId="0"/>
       <p:bldP spid="19" grpId="0"/>
       <p:bldP spid="22" grpId="0"/>
+      <p:bldP spid="25" grpId="0"/>
     </p:bldLst>
   </p:timing>
 </p:sld>
@@ -9134,7 +9334,7 @@
           <p:cNvPr id="15" name="">
             <a:extLst xmlns:a="http://schemas.openxmlformats.org/drawingml/2006/main">
               <a:ext uri="{FF2B5EF4-FFF2-40B4-BE49-F238E27FC236}">
-                <a16:creationId xmlns:a16="http://schemas.microsoft.com/office/drawing/2014/main" id="{BA084F3E-EC26-4E68-9778-F942978852A1}"/>
+                <a16:creationId xmlns:a16="http://schemas.microsoft.com/office/drawing/2014/main" id="{F5563143-28F4-4058-83B7-346B36C3331F}"/>
               </a:ext>
             </a:extLst>
           </p:cNvPr>
@@ -9166,7 +9366,7 @@
           <p:cNvPr id="2" name="">
             <a:extLst xmlns:a="http://schemas.openxmlformats.org/drawingml/2006/main">
               <a:ext uri="{FF2B5EF4-FFF2-40B4-BE49-F238E27FC236}">
-                <a16:creationId xmlns:a16="http://schemas.microsoft.com/office/drawing/2014/main" id="{45F97080-2A97-4A26-A251-5E848B5ABBF2}"/>
+                <a16:creationId xmlns:a16="http://schemas.microsoft.com/office/drawing/2014/main" id="{2FC80A94-2EFD-4A20-8D03-998532EEBEF2}"/>
               </a:ext>
             </a:extLst>
           </p:cNvPr>
@@ -9223,7 +9423,7 @@
           <p:cNvPr id="3" name="">
             <a:extLst xmlns:a="http://schemas.openxmlformats.org/drawingml/2006/main">
               <a:ext uri="{FF2B5EF4-FFF2-40B4-BE49-F238E27FC236}">
-                <a16:creationId xmlns:a16="http://schemas.microsoft.com/office/drawing/2014/main" id="{896ED1A0-8143-4814-BCFB-36A6E9B54BEC}"/>
+                <a16:creationId xmlns:a16="http://schemas.microsoft.com/office/drawing/2014/main" id="{4CD811B9-DC89-4B12-9B07-5B6668631ADE}"/>
               </a:ext>
             </a:extLst>
           </p:cNvPr>
@@ -9255,7 +9455,7 @@
           <p:cNvPr id="4" name="">
             <a:extLst xmlns:a="http://schemas.openxmlformats.org/drawingml/2006/main">
               <a:ext uri="{FF2B5EF4-FFF2-40B4-BE49-F238E27FC236}">
-                <a16:creationId xmlns:a16="http://schemas.microsoft.com/office/drawing/2014/main" id="{DD5A19AC-0992-4042-86A0-3AAEE0C4F96D}"/>
+                <a16:creationId xmlns:a16="http://schemas.microsoft.com/office/drawing/2014/main" id="{5838142F-C6B8-4113-8550-8328C2C661F0}"/>
               </a:ext>
             </a:extLst>
           </p:cNvPr>
@@ -9312,7 +9512,7 @@
           <p:cNvPr id="5" name="">
             <a:extLst xmlns:a="http://schemas.openxmlformats.org/drawingml/2006/main">
               <a:ext uri="{FF2B5EF4-FFF2-40B4-BE49-F238E27FC236}">
-                <a16:creationId xmlns:a16="http://schemas.microsoft.com/office/drawing/2014/main" id="{C08A6FEA-9C91-41E5-A0F0-D571C215DECE}"/>
+                <a16:creationId xmlns:a16="http://schemas.microsoft.com/office/drawing/2014/main" id="{98C19148-4C45-4D6D-A104-6378DA191CA1}"/>
               </a:ext>
             </a:extLst>
           </p:cNvPr>
@@ -9369,7 +9569,7 @@
           <p:cNvPr id="6" name="">
             <a:extLst xmlns:a="http://schemas.openxmlformats.org/drawingml/2006/main">
               <a:ext uri="{FF2B5EF4-FFF2-40B4-BE49-F238E27FC236}">
-                <a16:creationId xmlns:a16="http://schemas.microsoft.com/office/drawing/2014/main" id="{C8AE4B28-DA64-416E-8574-307DDBBD8AC4}"/>
+                <a16:creationId xmlns:a16="http://schemas.microsoft.com/office/drawing/2014/main" id="{099A31DF-A59D-485E-96A5-A47701B6456C}"/>
               </a:ext>
             </a:extLst>
           </p:cNvPr>
@@ -9426,7 +9626,7 @@
           <p:cNvPr id="7" name="">
             <a:extLst xmlns:a="http://schemas.openxmlformats.org/drawingml/2006/main">
               <a:ext uri="{FF2B5EF4-FFF2-40B4-BE49-F238E27FC236}">
-                <a16:creationId xmlns:a16="http://schemas.microsoft.com/office/drawing/2014/main" id="{C8EDB403-B13B-4470-80FC-93505E450552}"/>
+                <a16:creationId xmlns:a16="http://schemas.microsoft.com/office/drawing/2014/main" id="{FE30F98B-7F62-4B71-B6CC-34C77A50258D}"/>
               </a:ext>
             </a:extLst>
           </p:cNvPr>
@@ -9458,7 +9658,7 @@
           <p:cNvPr id="8" name="">
             <a:extLst xmlns:a="http://schemas.openxmlformats.org/drawingml/2006/main">
               <a:ext uri="{FF2B5EF4-FFF2-40B4-BE49-F238E27FC236}">
-                <a16:creationId xmlns:a16="http://schemas.microsoft.com/office/drawing/2014/main" id="{C45B647D-85DF-4A84-A777-D3AF6CDD1074}"/>
+                <a16:creationId xmlns:a16="http://schemas.microsoft.com/office/drawing/2014/main" id="{915DE58D-7A9B-42E0-9A44-2C15E97A0482}"/>
               </a:ext>
             </a:extLst>
           </p:cNvPr>
@@ -9515,7 +9715,7 @@
           <p:cNvPr id="9" name="">
             <a:extLst xmlns:a="http://schemas.openxmlformats.org/drawingml/2006/main">
               <a:ext uri="{FF2B5EF4-FFF2-40B4-BE49-F238E27FC236}">
-                <a16:creationId xmlns:a16="http://schemas.microsoft.com/office/drawing/2014/main" id="{D1A8B35D-B947-41B1-92C9-6FE61139B909}"/>
+                <a16:creationId xmlns:a16="http://schemas.microsoft.com/office/drawing/2014/main" id="{6C59E567-515A-44BC-997A-4A6F145ED2A9}"/>
               </a:ext>
             </a:extLst>
           </p:cNvPr>
@@ -9572,7 +9772,7 @@
           <p:cNvPr id="10" name="">
             <a:extLst xmlns:a="http://schemas.openxmlformats.org/drawingml/2006/main">
               <a:ext uri="{FF2B5EF4-FFF2-40B4-BE49-F238E27FC236}">
-                <a16:creationId xmlns:a16="http://schemas.microsoft.com/office/drawing/2014/main" id="{5B5EB3A3-079E-41A4-BE8E-BB76A64D6009}"/>
+                <a16:creationId xmlns:a16="http://schemas.microsoft.com/office/drawing/2014/main" id="{D31411B9-0B9F-407E-8211-B30B6E063EB3}"/>
               </a:ext>
             </a:extLst>
           </p:cNvPr>
@@ -9629,7 +9829,7 @@
           <p:cNvPr id="11" name="">
             <a:extLst xmlns:a="http://schemas.openxmlformats.org/drawingml/2006/main">
               <a:ext uri="{FF2B5EF4-FFF2-40B4-BE49-F238E27FC236}">
-                <a16:creationId xmlns:a16="http://schemas.microsoft.com/office/drawing/2014/main" id="{352F3B39-5C21-447E-BA66-2B073B397CF1}"/>
+                <a16:creationId xmlns:a16="http://schemas.microsoft.com/office/drawing/2014/main" id="{274AAC58-8547-4AD1-A4F7-E6C78879B6FE}"/>
               </a:ext>
             </a:extLst>
           </p:cNvPr>
@@ -9686,7 +9886,7 @@
           <p:cNvPr id="12" name="">
             <a:extLst xmlns:a="http://schemas.openxmlformats.org/drawingml/2006/main">
               <a:ext uri="{FF2B5EF4-FFF2-40B4-BE49-F238E27FC236}">
-                <a16:creationId xmlns:a16="http://schemas.microsoft.com/office/drawing/2014/main" id="{1BB8AFE5-D130-40ED-83F8-A43F4A283BAB}"/>
+                <a16:creationId xmlns:a16="http://schemas.microsoft.com/office/drawing/2014/main" id="{3194A117-7078-4F56-9C33-FD7AC93D9E1E}"/>
               </a:ext>
             </a:extLst>
           </p:cNvPr>
@@ -9718,7 +9918,7 @@
           <p:cNvPr id="13" name="">
             <a:extLst xmlns:a="http://schemas.openxmlformats.org/drawingml/2006/main">
               <a:ext uri="{FF2B5EF4-FFF2-40B4-BE49-F238E27FC236}">
-                <a16:creationId xmlns:a16="http://schemas.microsoft.com/office/drawing/2014/main" id="{845DC292-BCB0-4F8B-B16C-1833DC5997A1}"/>
+                <a16:creationId xmlns:a16="http://schemas.microsoft.com/office/drawing/2014/main" id="{4A0E9D7C-AE2C-4F23-A141-6E7B4DE90B05}"/>
               </a:ext>
             </a:extLst>
           </p:cNvPr>
@@ -9775,7 +9975,7 @@
           <p:cNvPr id="14" name="">
             <a:extLst xmlns:a="http://schemas.openxmlformats.org/drawingml/2006/main">
               <a:ext uri="{FF2B5EF4-FFF2-40B4-BE49-F238E27FC236}">
-                <a16:creationId xmlns:a16="http://schemas.microsoft.com/office/drawing/2014/main" id="{75C77296-3F69-4124-A28C-27BDB143AE46}"/>
+                <a16:creationId xmlns:a16="http://schemas.microsoft.com/office/drawing/2014/main" id="{9840A6E1-189C-4B8B-A2FF-410D1C6027B8}"/>
               </a:ext>
             </a:extLst>
           </p:cNvPr>
@@ -9830,7 +10030,7 @@
     </p:spTree>
     <p:extLst>
       <p:ext uri="{BB962C8B-B14F-4D97-AF65-F5344CB8AC3E}">
-        <p14:creationId xmlns:p14="http://schemas.microsoft.com/office/powerpoint/2010/main" val="1185700056"/>
+        <p14:creationId xmlns:p14="http://schemas.microsoft.com/office/powerpoint/2010/main" val="429415965"/>
       </p:ext>
     </p:extLst>
   </p:cSld>
@@ -10031,7 +10231,7 @@
           <p:cNvPr id="16" name="">
             <a:extLst xmlns:a="http://schemas.openxmlformats.org/drawingml/2006/main">
               <a:ext uri="{FF2B5EF4-FFF2-40B4-BE49-F238E27FC236}">
-                <a16:creationId xmlns:a16="http://schemas.microsoft.com/office/drawing/2014/main" id="{0DFD0693-A006-4B01-9C93-1635649D8328}"/>
+                <a16:creationId xmlns:a16="http://schemas.microsoft.com/office/drawing/2014/main" id="{C5DE5327-9EA2-419D-9411-3A0A4F0F0C26}"/>
               </a:ext>
             </a:extLst>
           </p:cNvPr>
@@ -10063,7 +10263,7 @@
           <p:cNvPr id="2" name="">
             <a:extLst xmlns:a="http://schemas.openxmlformats.org/drawingml/2006/main">
               <a:ext uri="{FF2B5EF4-FFF2-40B4-BE49-F238E27FC236}">
-                <a16:creationId xmlns:a16="http://schemas.microsoft.com/office/drawing/2014/main" id="{9A0189F2-8E8C-4A24-B16C-ED49BE68EC09}"/>
+                <a16:creationId xmlns:a16="http://schemas.microsoft.com/office/drawing/2014/main" id="{1F95F6E7-190F-4CDF-B653-3ADE46B7EB9E}"/>
               </a:ext>
             </a:extLst>
           </p:cNvPr>
@@ -10120,7 +10320,7 @@
           <p:cNvPr id="3" name="">
             <a:extLst xmlns:a="http://schemas.openxmlformats.org/drawingml/2006/main">
               <a:ext uri="{FF2B5EF4-FFF2-40B4-BE49-F238E27FC236}">
-                <a16:creationId xmlns:a16="http://schemas.microsoft.com/office/drawing/2014/main" id="{80DEFFD7-F35F-43C7-BD10-582358D0FA3E}"/>
+                <a16:creationId xmlns:a16="http://schemas.microsoft.com/office/drawing/2014/main" id="{63CE0F95-9616-4993-8951-639DD08F5B47}"/>
               </a:ext>
             </a:extLst>
           </p:cNvPr>
@@ -10152,7 +10352,7 @@
           <p:cNvPr id="4" name="">
             <a:extLst xmlns:a="http://schemas.openxmlformats.org/drawingml/2006/main">
               <a:ext uri="{FF2B5EF4-FFF2-40B4-BE49-F238E27FC236}">
-                <a16:creationId xmlns:a16="http://schemas.microsoft.com/office/drawing/2014/main" id="{B6D566C7-02CF-4A9B-B2BA-0C9EB211608E}"/>
+                <a16:creationId xmlns:a16="http://schemas.microsoft.com/office/drawing/2014/main" id="{67D3F505-EC67-439D-BF14-342204CE36AD}"/>
               </a:ext>
             </a:extLst>
           </p:cNvPr>
@@ -10209,7 +10409,7 @@
           <p:cNvPr id="5" name="">
             <a:extLst xmlns:a="http://schemas.openxmlformats.org/drawingml/2006/main">
               <a:ext uri="{FF2B5EF4-FFF2-40B4-BE49-F238E27FC236}">
-                <a16:creationId xmlns:a16="http://schemas.microsoft.com/office/drawing/2014/main" id="{A7D72BF9-0229-4EFF-943C-BCA9D9207CD4}"/>
+                <a16:creationId xmlns:a16="http://schemas.microsoft.com/office/drawing/2014/main" id="{82BF9E8B-DBBC-43D8-B056-C79D7379B439}"/>
               </a:ext>
             </a:extLst>
           </p:cNvPr>
@@ -10266,7 +10466,7 @@
           <p:cNvPr id="6" name="">
             <a:extLst xmlns:a="http://schemas.openxmlformats.org/drawingml/2006/main">
               <a:ext uri="{FF2B5EF4-FFF2-40B4-BE49-F238E27FC236}">
-                <a16:creationId xmlns:a16="http://schemas.microsoft.com/office/drawing/2014/main" id="{76D71743-24BF-4DD6-86F4-838FA59F9552}"/>
+                <a16:creationId xmlns:a16="http://schemas.microsoft.com/office/drawing/2014/main" id="{1A86AE90-E9B0-4123-B315-58FD558969E8}"/>
               </a:ext>
             </a:extLst>
           </p:cNvPr>
@@ -10323,7 +10523,7 @@
           <p:cNvPr id="7" name="">
             <a:extLst xmlns:a="http://schemas.openxmlformats.org/drawingml/2006/main">
               <a:ext uri="{FF2B5EF4-FFF2-40B4-BE49-F238E27FC236}">
-                <a16:creationId xmlns:a16="http://schemas.microsoft.com/office/drawing/2014/main" id="{7B5DE161-CA26-441D-9716-F2BC0C87674E}"/>
+                <a16:creationId xmlns:a16="http://schemas.microsoft.com/office/drawing/2014/main" id="{E944B7BD-F177-4CA1-8B8A-5EA993E38705}"/>
               </a:ext>
             </a:extLst>
           </p:cNvPr>
@@ -10355,7 +10555,7 @@
           <p:cNvPr id="8" name="">
             <a:extLst xmlns:a="http://schemas.openxmlformats.org/drawingml/2006/main">
               <a:ext uri="{FF2B5EF4-FFF2-40B4-BE49-F238E27FC236}">
-                <a16:creationId xmlns:a16="http://schemas.microsoft.com/office/drawing/2014/main" id="{401402AA-35A8-4875-8091-F971709786E9}"/>
+                <a16:creationId xmlns:a16="http://schemas.microsoft.com/office/drawing/2014/main" id="{EE2BE276-AAA1-4AB4-A214-3014C1B0F369}"/>
               </a:ext>
             </a:extLst>
           </p:cNvPr>
@@ -10412,7 +10612,7 @@
           <p:cNvPr id="9" name="">
             <a:extLst xmlns:a="http://schemas.openxmlformats.org/drawingml/2006/main">
               <a:ext uri="{FF2B5EF4-FFF2-40B4-BE49-F238E27FC236}">
-                <a16:creationId xmlns:a16="http://schemas.microsoft.com/office/drawing/2014/main" id="{A1D0BF44-8CAF-4AFB-9B93-3E0C67459DD8}"/>
+                <a16:creationId xmlns:a16="http://schemas.microsoft.com/office/drawing/2014/main" id="{10371631-C4D6-4DF6-80C0-2AE9EE55F3FB}"/>
               </a:ext>
             </a:extLst>
           </p:cNvPr>
@@ -10469,7 +10669,7 @@
           <p:cNvPr id="10" name="">
             <a:extLst xmlns:a="http://schemas.openxmlformats.org/drawingml/2006/main">
               <a:ext uri="{FF2B5EF4-FFF2-40B4-BE49-F238E27FC236}">
-                <a16:creationId xmlns:a16="http://schemas.microsoft.com/office/drawing/2014/main" id="{5166C2AA-1811-4924-BE39-BD21F2AB6F7F}"/>
+                <a16:creationId xmlns:a16="http://schemas.microsoft.com/office/drawing/2014/main" id="{3794B0FB-41AB-4635-B7DB-A01177C50CBA}"/>
               </a:ext>
             </a:extLst>
           </p:cNvPr>
@@ -10526,7 +10726,7 @@
           <p:cNvPr id="11" name="">
             <a:extLst xmlns:a="http://schemas.openxmlformats.org/drawingml/2006/main">
               <a:ext uri="{FF2B5EF4-FFF2-40B4-BE49-F238E27FC236}">
-                <a16:creationId xmlns:a16="http://schemas.microsoft.com/office/drawing/2014/main" id="{2CA45E04-C4BA-47DD-8E0F-7F72E9D79D8B}"/>
+                <a16:creationId xmlns:a16="http://schemas.microsoft.com/office/drawing/2014/main" id="{54D1C254-B929-41B2-AB6F-34F6D187B07D}"/>
               </a:ext>
             </a:extLst>
           </p:cNvPr>
@@ -10583,7 +10783,7 @@
           <p:cNvPr id="12" name="">
             <a:extLst xmlns:a="http://schemas.openxmlformats.org/drawingml/2006/main">
               <a:ext uri="{FF2B5EF4-FFF2-40B4-BE49-F238E27FC236}">
-                <a16:creationId xmlns:a16="http://schemas.microsoft.com/office/drawing/2014/main" id="{544B0A9C-782F-4FC9-AE81-327565BDD632}"/>
+                <a16:creationId xmlns:a16="http://schemas.microsoft.com/office/drawing/2014/main" id="{6FCF64FD-74B7-4521-BCE3-CC1F3699FFBD}"/>
               </a:ext>
             </a:extLst>
           </p:cNvPr>
@@ -10640,7 +10840,7 @@
           <p:cNvPr id="13" name="">
             <a:extLst xmlns:a="http://schemas.openxmlformats.org/drawingml/2006/main">
               <a:ext uri="{FF2B5EF4-FFF2-40B4-BE49-F238E27FC236}">
-                <a16:creationId xmlns:a16="http://schemas.microsoft.com/office/drawing/2014/main" id="{78D6A608-5CF6-4A01-891C-E06BEF7C3BE4}"/>
+                <a16:creationId xmlns:a16="http://schemas.microsoft.com/office/drawing/2014/main" id="{02AED66D-F4BF-4B71-A253-EA8E1AC87235}"/>
               </a:ext>
             </a:extLst>
           </p:cNvPr>
@@ -10697,7 +10897,7 @@
           <p:cNvPr id="14" name="">
             <a:extLst xmlns:a="http://schemas.openxmlformats.org/drawingml/2006/main">
               <a:ext uri="{FF2B5EF4-FFF2-40B4-BE49-F238E27FC236}">
-                <a16:creationId xmlns:a16="http://schemas.microsoft.com/office/drawing/2014/main" id="{794EDA36-1B70-4EE7-B2BD-703550FB1974}"/>
+                <a16:creationId xmlns:a16="http://schemas.microsoft.com/office/drawing/2014/main" id="{69BB3B6E-CC48-4092-96D8-FD9B7FBD0DE4}"/>
               </a:ext>
             </a:extLst>
           </p:cNvPr>
@@ -10754,7 +10954,7 @@
           <p:cNvPr id="15" name="">
             <a:extLst xmlns:a="http://schemas.openxmlformats.org/drawingml/2006/main">
               <a:ext uri="{FF2B5EF4-FFF2-40B4-BE49-F238E27FC236}">
-                <a16:creationId xmlns:a16="http://schemas.microsoft.com/office/drawing/2014/main" id="{CD92B44B-AC20-45F1-92A6-268EB20CC792}"/>
+                <a16:creationId xmlns:a16="http://schemas.microsoft.com/office/drawing/2014/main" id="{BA15C598-4E70-4C49-8DC1-432DD7049F41}"/>
               </a:ext>
             </a:extLst>
           </p:cNvPr>
@@ -10809,7 +11009,7 @@
     </p:spTree>
     <p:extLst>
       <p:ext uri="{BB962C8B-B14F-4D97-AF65-F5344CB8AC3E}">
-        <p14:creationId xmlns:p14="http://schemas.microsoft.com/office/powerpoint/2010/main" val="1617643856"/>
+        <p14:creationId xmlns:p14="http://schemas.microsoft.com/office/powerpoint/2010/main" val="1269605242"/>
       </p:ext>
     </p:extLst>
   </p:cSld>
@@ -10964,7 +11164,7 @@
           <p:cNvPr id="16" name="">
             <a:extLst xmlns:a="http://schemas.openxmlformats.org/drawingml/2006/main">
               <a:ext uri="{FF2B5EF4-FFF2-40B4-BE49-F238E27FC236}">
-                <a16:creationId xmlns:a16="http://schemas.microsoft.com/office/drawing/2014/main" id="{3D45862F-9E2C-4E0B-BE9E-8CE8F0A493B6}"/>
+                <a16:creationId xmlns:a16="http://schemas.microsoft.com/office/drawing/2014/main" id="{3D3174BB-C054-4ECF-B507-1CBF713EDF95}"/>
               </a:ext>
             </a:extLst>
           </p:cNvPr>
@@ -10996,7 +11196,7 @@
           <p:cNvPr id="2" name="">
             <a:extLst xmlns:a="http://schemas.openxmlformats.org/drawingml/2006/main">
               <a:ext uri="{FF2B5EF4-FFF2-40B4-BE49-F238E27FC236}">
-                <a16:creationId xmlns:a16="http://schemas.microsoft.com/office/drawing/2014/main" id="{BEDCFC96-AE38-4B76-AABF-72CC163962C3}"/>
+                <a16:creationId xmlns:a16="http://schemas.microsoft.com/office/drawing/2014/main" id="{AA83856B-51AC-43BD-81A8-89EFF6DFDA36}"/>
               </a:ext>
             </a:extLst>
           </p:cNvPr>
@@ -11053,7 +11253,7 @@
           <p:cNvPr id="3" name="">
             <a:extLst xmlns:a="http://schemas.openxmlformats.org/drawingml/2006/main">
               <a:ext uri="{FF2B5EF4-FFF2-40B4-BE49-F238E27FC236}">
-                <a16:creationId xmlns:a16="http://schemas.microsoft.com/office/drawing/2014/main" id="{B6567F69-1025-410C-A2B2-835402383A94}"/>
+                <a16:creationId xmlns:a16="http://schemas.microsoft.com/office/drawing/2014/main" id="{A50ACB93-230F-4C7F-89C6-8B74164C4386}"/>
               </a:ext>
             </a:extLst>
           </p:cNvPr>
@@ -11085,7 +11285,7 @@
           <p:cNvPr id="4" name="">
             <a:extLst xmlns:a="http://schemas.openxmlformats.org/drawingml/2006/main">
               <a:ext uri="{FF2B5EF4-FFF2-40B4-BE49-F238E27FC236}">
-                <a16:creationId xmlns:a16="http://schemas.microsoft.com/office/drawing/2014/main" id="{917AFE11-01D1-4D19-86E6-9118E93FED62}"/>
+                <a16:creationId xmlns:a16="http://schemas.microsoft.com/office/drawing/2014/main" id="{F699FFE0-9D4D-40D4-B2D0-8F47716D4558}"/>
               </a:ext>
             </a:extLst>
           </p:cNvPr>
@@ -11142,7 +11342,7 @@
           <p:cNvPr id="5" name="">
             <a:extLst xmlns:a="http://schemas.openxmlformats.org/drawingml/2006/main">
               <a:ext uri="{FF2B5EF4-FFF2-40B4-BE49-F238E27FC236}">
-                <a16:creationId xmlns:a16="http://schemas.microsoft.com/office/drawing/2014/main" id="{32A9B422-3079-4900-9EDB-38A391E38962}"/>
+                <a16:creationId xmlns:a16="http://schemas.microsoft.com/office/drawing/2014/main" id="{C9AC923D-75D4-47ED-BC7A-B1FDB824DFC3}"/>
               </a:ext>
             </a:extLst>
           </p:cNvPr>
@@ -11199,7 +11399,7 @@
           <p:cNvPr id="6" name="">
             <a:extLst xmlns:a="http://schemas.openxmlformats.org/drawingml/2006/main">
               <a:ext uri="{FF2B5EF4-FFF2-40B4-BE49-F238E27FC236}">
-                <a16:creationId xmlns:a16="http://schemas.microsoft.com/office/drawing/2014/main" id="{D2921542-85A2-49C6-BF65-9C45977C3E16}"/>
+                <a16:creationId xmlns:a16="http://schemas.microsoft.com/office/drawing/2014/main" id="{CEB74434-DB15-4FE5-A967-DF81C90BF53B}"/>
               </a:ext>
             </a:extLst>
           </p:cNvPr>
@@ -11256,7 +11456,7 @@
           <p:cNvPr id="7" name="">
             <a:extLst xmlns:a="http://schemas.openxmlformats.org/drawingml/2006/main">
               <a:ext uri="{FF2B5EF4-FFF2-40B4-BE49-F238E27FC236}">
-                <a16:creationId xmlns:a16="http://schemas.microsoft.com/office/drawing/2014/main" id="{293C1E1B-4F59-4279-B81D-B25C99BD6562}"/>
+                <a16:creationId xmlns:a16="http://schemas.microsoft.com/office/drawing/2014/main" id="{75994A5C-B40F-4673-88FB-2157141730D5}"/>
               </a:ext>
             </a:extLst>
           </p:cNvPr>
@@ -11288,7 +11488,7 @@
           <p:cNvPr id="8" name="">
             <a:extLst xmlns:a="http://schemas.openxmlformats.org/drawingml/2006/main">
               <a:ext uri="{FF2B5EF4-FFF2-40B4-BE49-F238E27FC236}">
-                <a16:creationId xmlns:a16="http://schemas.microsoft.com/office/drawing/2014/main" id="{26A0F788-CB63-4F92-B691-043CF95E0893}"/>
+                <a16:creationId xmlns:a16="http://schemas.microsoft.com/office/drawing/2014/main" id="{0DB0826E-8E1C-43C7-B186-AF029E65E571}"/>
               </a:ext>
             </a:extLst>
           </p:cNvPr>
@@ -11345,7 +11545,7 @@
           <p:cNvPr id="9" name="">
             <a:extLst xmlns:a="http://schemas.openxmlformats.org/drawingml/2006/main">
               <a:ext uri="{FF2B5EF4-FFF2-40B4-BE49-F238E27FC236}">
-                <a16:creationId xmlns:a16="http://schemas.microsoft.com/office/drawing/2014/main" id="{B8AA760D-E1BD-49DD-B34A-79138E63F2BD}"/>
+                <a16:creationId xmlns:a16="http://schemas.microsoft.com/office/drawing/2014/main" id="{4C637DC8-592D-4413-9FC9-6486ED9312C5}"/>
               </a:ext>
             </a:extLst>
           </p:cNvPr>
@@ -11406,7 +11606,7 @@
           <p:nvPr/>
         </p:nvPicPr>
         <p:blipFill>
-          <a:blip xmlns:r="http://schemas.openxmlformats.org/officeDocument/2006/relationships" xmlns:a="http://schemas.openxmlformats.org/drawingml/2006/main" r:embed="R3936fdff09de4bc4"/>
+          <a:blip xmlns:r="http://schemas.openxmlformats.org/officeDocument/2006/relationships" xmlns:a="http://schemas.openxmlformats.org/drawingml/2006/main" r:embed="Ra2b4522db78f42b6"/>
           <a:stretch xmlns:a="http://schemas.openxmlformats.org/drawingml/2006/main"/>
         </p:blipFill>
         <p:spPr>
@@ -11424,7 +11624,7 @@
           <p:cNvPr id="11" name="">
             <a:extLst xmlns:a="http://schemas.openxmlformats.org/drawingml/2006/main">
               <a:ext uri="{FF2B5EF4-FFF2-40B4-BE49-F238E27FC236}">
-                <a16:creationId xmlns:a16="http://schemas.microsoft.com/office/drawing/2014/main" id="{AD032A68-34D4-45D5-A760-B1E9FBB9EF27}"/>
+                <a16:creationId xmlns:a16="http://schemas.microsoft.com/office/drawing/2014/main" id="{1B7B4D8F-057B-4CCD-BCA8-4F8F6CC1E1C3}"/>
               </a:ext>
             </a:extLst>
           </p:cNvPr>
@@ -11481,7 +11681,7 @@
           <p:cNvPr id="12" name="">
             <a:extLst xmlns:a="http://schemas.openxmlformats.org/drawingml/2006/main">
               <a:ext uri="{FF2B5EF4-FFF2-40B4-BE49-F238E27FC236}">
-                <a16:creationId xmlns:a16="http://schemas.microsoft.com/office/drawing/2014/main" id="{82D2A9FC-13FC-49B8-B172-AAFBD38D0584}"/>
+                <a16:creationId xmlns:a16="http://schemas.microsoft.com/office/drawing/2014/main" id="{6A8DB831-1326-4A00-9021-357393A2CD8E}"/>
               </a:ext>
             </a:extLst>
           </p:cNvPr>
@@ -11538,7 +11738,7 @@
           <p:cNvPr id="13" name="">
             <a:extLst xmlns:a="http://schemas.openxmlformats.org/drawingml/2006/main">
               <a:ext uri="{FF2B5EF4-FFF2-40B4-BE49-F238E27FC236}">
-                <a16:creationId xmlns:a16="http://schemas.microsoft.com/office/drawing/2014/main" id="{E3CF2893-8496-4638-9436-D302CC3B48A2}"/>
+                <a16:creationId xmlns:a16="http://schemas.microsoft.com/office/drawing/2014/main" id="{B712D4BE-7DE1-4DED-A598-95ABF9F83349}"/>
               </a:ext>
             </a:extLst>
           </p:cNvPr>
@@ -11570,7 +11770,7 @@
           <p:cNvPr id="14" name="">
             <a:extLst xmlns:a="http://schemas.openxmlformats.org/drawingml/2006/main">
               <a:ext uri="{FF2B5EF4-FFF2-40B4-BE49-F238E27FC236}">
-                <a16:creationId xmlns:a16="http://schemas.microsoft.com/office/drawing/2014/main" id="{0E2A7003-A8EF-4D4F-AA8E-83170C40E819}"/>
+                <a16:creationId xmlns:a16="http://schemas.microsoft.com/office/drawing/2014/main" id="{35C8F473-5147-48FF-BAC6-FF382545B7F8}"/>
               </a:ext>
             </a:extLst>
           </p:cNvPr>
@@ -11627,7 +11827,7 @@
           <p:cNvPr id="15" name="">
             <a:extLst xmlns:a="http://schemas.openxmlformats.org/drawingml/2006/main">
               <a:ext uri="{FF2B5EF4-FFF2-40B4-BE49-F238E27FC236}">
-                <a16:creationId xmlns:a16="http://schemas.microsoft.com/office/drawing/2014/main" id="{16463B28-3C71-4742-B28D-9868EFA4EF24}"/>
+                <a16:creationId xmlns:a16="http://schemas.microsoft.com/office/drawing/2014/main" id="{E14DE5EA-1484-4D20-963C-CAF9C3F50A5A}"/>
               </a:ext>
             </a:extLst>
           </p:cNvPr>
@@ -11682,7 +11882,7 @@
     </p:spTree>
     <p:extLst>
       <p:ext uri="{BB962C8B-B14F-4D97-AF65-F5344CB8AC3E}">
-        <p14:creationId xmlns:p14="http://schemas.microsoft.com/office/powerpoint/2010/main" val="432960125"/>
+        <p14:creationId xmlns:p14="http://schemas.microsoft.com/office/powerpoint/2010/main" val="60810147"/>
       </p:ext>
     </p:extLst>
   </p:cSld>
@@ -11837,7 +12037,7 @@
           <p:cNvPr id="23" name="">
             <a:extLst xmlns:a="http://schemas.openxmlformats.org/drawingml/2006/main">
               <a:ext uri="{FF2B5EF4-FFF2-40B4-BE49-F238E27FC236}">
-                <a16:creationId xmlns:a16="http://schemas.microsoft.com/office/drawing/2014/main" id="{616A503C-FC23-4BE0-8649-6C9375A83D23}"/>
+                <a16:creationId xmlns:a16="http://schemas.microsoft.com/office/drawing/2014/main" id="{8A6D84A9-9971-40E6-91CC-7E6298C17E64}"/>
               </a:ext>
             </a:extLst>
           </p:cNvPr>
@@ -11869,7 +12069,7 @@
           <p:cNvPr id="2" name="">
             <a:extLst xmlns:a="http://schemas.openxmlformats.org/drawingml/2006/main">
               <a:ext uri="{FF2B5EF4-FFF2-40B4-BE49-F238E27FC236}">
-                <a16:creationId xmlns:a16="http://schemas.microsoft.com/office/drawing/2014/main" id="{72F59AC3-ADF1-49C9-987D-523A814BCA9C}"/>
+                <a16:creationId xmlns:a16="http://schemas.microsoft.com/office/drawing/2014/main" id="{EB39561D-A198-45E9-802A-43AA5942549D}"/>
               </a:ext>
             </a:extLst>
           </p:cNvPr>
@@ -11926,7 +12126,7 @@
           <p:cNvPr id="3" name="">
             <a:extLst xmlns:a="http://schemas.openxmlformats.org/drawingml/2006/main">
               <a:ext uri="{FF2B5EF4-FFF2-40B4-BE49-F238E27FC236}">
-                <a16:creationId xmlns:a16="http://schemas.microsoft.com/office/drawing/2014/main" id="{833E5194-B836-400E-85BB-B4457E572B54}"/>
+                <a16:creationId xmlns:a16="http://schemas.microsoft.com/office/drawing/2014/main" id="{2FF49D31-1254-42F7-8F78-F084D12A2DE6}"/>
               </a:ext>
             </a:extLst>
           </p:cNvPr>
@@ -11958,7 +12158,7 @@
           <p:cNvPr id="4" name="">
             <a:extLst xmlns:a="http://schemas.openxmlformats.org/drawingml/2006/main">
               <a:ext uri="{FF2B5EF4-FFF2-40B4-BE49-F238E27FC236}">
-                <a16:creationId xmlns:a16="http://schemas.microsoft.com/office/drawing/2014/main" id="{57DBF844-C9BF-4E1A-B2FD-493F780A82C7}"/>
+                <a16:creationId xmlns:a16="http://schemas.microsoft.com/office/drawing/2014/main" id="{8119B407-B5FD-4A0B-B468-387893E974DD}"/>
               </a:ext>
             </a:extLst>
           </p:cNvPr>
@@ -12015,7 +12215,7 @@
           <p:cNvPr id="5" name="">
             <a:extLst xmlns:a="http://schemas.openxmlformats.org/drawingml/2006/main">
               <a:ext uri="{FF2B5EF4-FFF2-40B4-BE49-F238E27FC236}">
-                <a16:creationId xmlns:a16="http://schemas.microsoft.com/office/drawing/2014/main" id="{9C40AEDA-1EBB-4D8B-82FB-2F4861A7696E}"/>
+                <a16:creationId xmlns:a16="http://schemas.microsoft.com/office/drawing/2014/main" id="{5122E633-AE03-4B5B-93C7-804540DF752F}"/>
               </a:ext>
             </a:extLst>
           </p:cNvPr>
@@ -12072,7 +12272,7 @@
           <p:cNvPr id="6" name="">
             <a:extLst xmlns:a="http://schemas.openxmlformats.org/drawingml/2006/main">
               <a:ext uri="{FF2B5EF4-FFF2-40B4-BE49-F238E27FC236}">
-                <a16:creationId xmlns:a16="http://schemas.microsoft.com/office/drawing/2014/main" id="{25998620-BE00-4564-80E1-925415C20EE0}"/>
+                <a16:creationId xmlns:a16="http://schemas.microsoft.com/office/drawing/2014/main" id="{25B75247-C302-4D0C-A43E-C3064208FEB6}"/>
               </a:ext>
             </a:extLst>
           </p:cNvPr>
@@ -12129,7 +12329,7 @@
           <p:cNvPr id="7" name="">
             <a:extLst xmlns:a="http://schemas.openxmlformats.org/drawingml/2006/main">
               <a:ext uri="{FF2B5EF4-FFF2-40B4-BE49-F238E27FC236}">
-                <a16:creationId xmlns:a16="http://schemas.microsoft.com/office/drawing/2014/main" id="{9588E552-73F6-40D4-957F-C58DFB4CF25E}"/>
+                <a16:creationId xmlns:a16="http://schemas.microsoft.com/office/drawing/2014/main" id="{9C805E37-3B42-4DCA-8FDF-52129BBBAD2C}"/>
               </a:ext>
             </a:extLst>
           </p:cNvPr>
@@ -12161,7 +12361,7 @@
           <p:cNvPr id="8" name="">
             <a:extLst xmlns:a="http://schemas.openxmlformats.org/drawingml/2006/main">
               <a:ext uri="{FF2B5EF4-FFF2-40B4-BE49-F238E27FC236}">
-                <a16:creationId xmlns:a16="http://schemas.microsoft.com/office/drawing/2014/main" id="{7583840D-1975-4279-8974-123EBC8AF65B}"/>
+                <a16:creationId xmlns:a16="http://schemas.microsoft.com/office/drawing/2014/main" id="{4DD17E66-525C-46CF-BF9C-BC60CB9F9053}"/>
               </a:ext>
             </a:extLst>
           </p:cNvPr>
@@ -12218,7 +12418,7 @@
           <p:cNvPr id="9" name="">
             <a:extLst xmlns:a="http://schemas.openxmlformats.org/drawingml/2006/main">
               <a:ext uri="{FF2B5EF4-FFF2-40B4-BE49-F238E27FC236}">
-                <a16:creationId xmlns:a16="http://schemas.microsoft.com/office/drawing/2014/main" id="{CC543E8E-1B5D-4722-8680-665A7FDCB270}"/>
+                <a16:creationId xmlns:a16="http://schemas.microsoft.com/office/drawing/2014/main" id="{489D3BFA-7688-4529-9E46-8D095DED26EC}"/>
               </a:ext>
             </a:extLst>
           </p:cNvPr>
@@ -12275,7 +12475,7 @@
           <p:cNvPr id="10" name="">
             <a:extLst xmlns:a="http://schemas.openxmlformats.org/drawingml/2006/main">
               <a:ext uri="{FF2B5EF4-FFF2-40B4-BE49-F238E27FC236}">
-                <a16:creationId xmlns:a16="http://schemas.microsoft.com/office/drawing/2014/main" id="{D5AB3A20-675A-40D1-8CA6-C027313ECA13}"/>
+                <a16:creationId xmlns:a16="http://schemas.microsoft.com/office/drawing/2014/main" id="{42BAD434-4F4D-48B3-952F-F643E9710FBB}"/>
               </a:ext>
             </a:extLst>
           </p:cNvPr>
@@ -12309,7 +12509,7 @@
           <p:cNvPr id="11" name="">
             <a:extLst xmlns:a="http://schemas.openxmlformats.org/drawingml/2006/main">
               <a:ext uri="{FF2B5EF4-FFF2-40B4-BE49-F238E27FC236}">
-                <a16:creationId xmlns:a16="http://schemas.microsoft.com/office/drawing/2014/main" id="{C25BE901-ED8C-4668-AD79-B4E8AAA070BF}"/>
+                <a16:creationId xmlns:a16="http://schemas.microsoft.com/office/drawing/2014/main" id="{EC42F39D-A175-4E69-9266-E7FA401A79E9}"/>
               </a:ext>
             </a:extLst>
           </p:cNvPr>
@@ -12341,7 +12541,7 @@
           <p:cNvPr id="12" name="">
             <a:extLst xmlns:a="http://schemas.openxmlformats.org/drawingml/2006/main">
               <a:ext uri="{FF2B5EF4-FFF2-40B4-BE49-F238E27FC236}">
-                <a16:creationId xmlns:a16="http://schemas.microsoft.com/office/drawing/2014/main" id="{3E767932-41ED-43D5-8FE3-B88F1C891095}"/>
+                <a16:creationId xmlns:a16="http://schemas.microsoft.com/office/drawing/2014/main" id="{C033615D-242F-4F4A-AD20-8D5E6BDED852}"/>
               </a:ext>
             </a:extLst>
           </p:cNvPr>
@@ -12398,7 +12598,7 @@
           <p:cNvPr id="13" name="">
             <a:extLst xmlns:a="http://schemas.openxmlformats.org/drawingml/2006/main">
               <a:ext uri="{FF2B5EF4-FFF2-40B4-BE49-F238E27FC236}">
-                <a16:creationId xmlns:a16="http://schemas.microsoft.com/office/drawing/2014/main" id="{820E9F1E-1CC7-442A-B8D2-DD480334CD72}"/>
+                <a16:creationId xmlns:a16="http://schemas.microsoft.com/office/drawing/2014/main" id="{4BD814F3-6209-4B67-BE17-ED0FE9CD4453}"/>
               </a:ext>
             </a:extLst>
           </p:cNvPr>
@@ -12455,7 +12655,7 @@
           <p:cNvPr id="14" name="">
             <a:extLst xmlns:a="http://schemas.openxmlformats.org/drawingml/2006/main">
               <a:ext uri="{FF2B5EF4-FFF2-40B4-BE49-F238E27FC236}">
-                <a16:creationId xmlns:a16="http://schemas.microsoft.com/office/drawing/2014/main" id="{7C8B14FB-8661-471B-B52E-77CB47683AAD}"/>
+                <a16:creationId xmlns:a16="http://schemas.microsoft.com/office/drawing/2014/main" id="{371BE51F-16C3-4657-B6D5-0AC787B4F3C9}"/>
               </a:ext>
             </a:extLst>
           </p:cNvPr>
@@ -12489,7 +12689,7 @@
           <p:cNvPr id="15" name="">
             <a:extLst xmlns:a="http://schemas.openxmlformats.org/drawingml/2006/main">
               <a:ext uri="{FF2B5EF4-FFF2-40B4-BE49-F238E27FC236}">
-                <a16:creationId xmlns:a16="http://schemas.microsoft.com/office/drawing/2014/main" id="{501483A5-EAF6-4F34-9AEB-3D467044FDF1}"/>
+                <a16:creationId xmlns:a16="http://schemas.microsoft.com/office/drawing/2014/main" id="{52358384-F8E5-4414-BDB9-F60300C8B9DD}"/>
               </a:ext>
             </a:extLst>
           </p:cNvPr>
@@ -12521,7 +12721,7 @@
           <p:cNvPr id="16" name="">
             <a:extLst xmlns:a="http://schemas.openxmlformats.org/drawingml/2006/main">
               <a:ext uri="{FF2B5EF4-FFF2-40B4-BE49-F238E27FC236}">
-                <a16:creationId xmlns:a16="http://schemas.microsoft.com/office/drawing/2014/main" id="{E6E8B8B7-8858-4AC1-A3F1-5C3A828657F2}"/>
+                <a16:creationId xmlns:a16="http://schemas.microsoft.com/office/drawing/2014/main" id="{BD7B135D-17A4-47B5-8CAF-91086FC15AB0}"/>
               </a:ext>
             </a:extLst>
           </p:cNvPr>
@@ -12578,7 +12778,7 @@
           <p:cNvPr id="17" name="">
             <a:extLst xmlns:a="http://schemas.openxmlformats.org/drawingml/2006/main">
               <a:ext uri="{FF2B5EF4-FFF2-40B4-BE49-F238E27FC236}">
-                <a16:creationId xmlns:a16="http://schemas.microsoft.com/office/drawing/2014/main" id="{522130FA-CA9A-4106-879C-38F25CB55B46}"/>
+                <a16:creationId xmlns:a16="http://schemas.microsoft.com/office/drawing/2014/main" id="{ACAB4FB5-47E5-4752-AF17-514D876051F5}"/>
               </a:ext>
             </a:extLst>
           </p:cNvPr>
@@ -12635,7 +12835,7 @@
           <p:cNvPr id="18" name="">
             <a:extLst xmlns:a="http://schemas.openxmlformats.org/drawingml/2006/main">
               <a:ext uri="{FF2B5EF4-FFF2-40B4-BE49-F238E27FC236}">
-                <a16:creationId xmlns:a16="http://schemas.microsoft.com/office/drawing/2014/main" id="{EEC65446-05A7-4968-8033-2716865B1183}"/>
+                <a16:creationId xmlns:a16="http://schemas.microsoft.com/office/drawing/2014/main" id="{37C15717-949D-428D-ACC6-5EACE7BBE308}"/>
               </a:ext>
             </a:extLst>
           </p:cNvPr>
@@ -12669,7 +12869,7 @@
           <p:cNvPr id="19" name="">
             <a:extLst xmlns:a="http://schemas.openxmlformats.org/drawingml/2006/main">
               <a:ext uri="{FF2B5EF4-FFF2-40B4-BE49-F238E27FC236}">
-                <a16:creationId xmlns:a16="http://schemas.microsoft.com/office/drawing/2014/main" id="{4FF5687B-9053-4E1F-A379-C5173138D73A}"/>
+                <a16:creationId xmlns:a16="http://schemas.microsoft.com/office/drawing/2014/main" id="{A9AC78AC-A58C-4E5E-8B9A-3C58D949E999}"/>
               </a:ext>
             </a:extLst>
           </p:cNvPr>
@@ -12701,7 +12901,7 @@
           <p:cNvPr id="20" name="">
             <a:extLst xmlns:a="http://schemas.openxmlformats.org/drawingml/2006/main">
               <a:ext uri="{FF2B5EF4-FFF2-40B4-BE49-F238E27FC236}">
-                <a16:creationId xmlns:a16="http://schemas.microsoft.com/office/drawing/2014/main" id="{88A7B1CD-782A-4DF4-9A6D-1557E5970A21}"/>
+                <a16:creationId xmlns:a16="http://schemas.microsoft.com/office/drawing/2014/main" id="{C0694795-AEE0-496B-A9BF-9397C3F311A8}"/>
               </a:ext>
             </a:extLst>
           </p:cNvPr>
@@ -12758,7 +12958,7 @@
           <p:cNvPr id="21" name="">
             <a:extLst xmlns:a="http://schemas.openxmlformats.org/drawingml/2006/main">
               <a:ext uri="{FF2B5EF4-FFF2-40B4-BE49-F238E27FC236}">
-                <a16:creationId xmlns:a16="http://schemas.microsoft.com/office/drawing/2014/main" id="{11F61F60-A667-4AB4-9519-C2E2103E1D42}"/>
+                <a16:creationId xmlns:a16="http://schemas.microsoft.com/office/drawing/2014/main" id="{DE3C8F5C-691C-4400-8A30-23FAD246239B}"/>
               </a:ext>
             </a:extLst>
           </p:cNvPr>
@@ -12815,7 +13015,7 @@
           <p:cNvPr id="22" name="">
             <a:extLst xmlns:a="http://schemas.openxmlformats.org/drawingml/2006/main">
               <a:ext uri="{FF2B5EF4-FFF2-40B4-BE49-F238E27FC236}">
-                <a16:creationId xmlns:a16="http://schemas.microsoft.com/office/drawing/2014/main" id="{795695CF-6D09-4C1F-AD9D-5040D45C07F8}"/>
+                <a16:creationId xmlns:a16="http://schemas.microsoft.com/office/drawing/2014/main" id="{1C79C2D0-E532-4915-A40E-18599704EC10}"/>
               </a:ext>
             </a:extLst>
           </p:cNvPr>
@@ -12870,7 +13070,7 @@
     </p:spTree>
     <p:extLst>
       <p:ext uri="{BB962C8B-B14F-4D97-AF65-F5344CB8AC3E}">
-        <p14:creationId xmlns:p14="http://schemas.microsoft.com/office/powerpoint/2010/main" val="1744346683"/>
+        <p14:creationId xmlns:p14="http://schemas.microsoft.com/office/powerpoint/2010/main" val="1085692688"/>
       </p:ext>
     </p:extLst>
   </p:cSld>
@@ -13071,7 +13271,7 @@
           <p:cNvPr id="22" name="">
             <a:extLst xmlns:a="http://schemas.openxmlformats.org/drawingml/2006/main">
               <a:ext uri="{FF2B5EF4-FFF2-40B4-BE49-F238E27FC236}">
-                <a16:creationId xmlns:a16="http://schemas.microsoft.com/office/drawing/2014/main" id="{11AB27F9-B5CC-486B-AE42-09A0E77C0045}"/>
+                <a16:creationId xmlns:a16="http://schemas.microsoft.com/office/drawing/2014/main" id="{0B9E203E-F071-4448-8B1C-8F6C36262C76}"/>
               </a:ext>
             </a:extLst>
           </p:cNvPr>
@@ -13103,7 +13303,7 @@
           <p:cNvPr id="2" name="">
             <a:extLst xmlns:a="http://schemas.openxmlformats.org/drawingml/2006/main">
               <a:ext uri="{FF2B5EF4-FFF2-40B4-BE49-F238E27FC236}">
-                <a16:creationId xmlns:a16="http://schemas.microsoft.com/office/drawing/2014/main" id="{9274D995-9BB0-43BF-AED2-4187435ABB29}"/>
+                <a16:creationId xmlns:a16="http://schemas.microsoft.com/office/drawing/2014/main" id="{489BB18C-1C1B-419F-BBDC-69EBC2AF0943}"/>
               </a:ext>
             </a:extLst>
           </p:cNvPr>
@@ -13160,7 +13360,7 @@
           <p:cNvPr id="3" name="">
             <a:extLst xmlns:a="http://schemas.openxmlformats.org/drawingml/2006/main">
               <a:ext uri="{FF2B5EF4-FFF2-40B4-BE49-F238E27FC236}">
-                <a16:creationId xmlns:a16="http://schemas.microsoft.com/office/drawing/2014/main" id="{17448410-FCBF-47B0-8752-B1EDB5D2E2FB}"/>
+                <a16:creationId xmlns:a16="http://schemas.microsoft.com/office/drawing/2014/main" id="{05E22724-DAD1-43CE-B1FE-3C74D4F99850}"/>
               </a:ext>
             </a:extLst>
           </p:cNvPr>
@@ -13192,7 +13392,7 @@
           <p:cNvPr id="4" name="">
             <a:extLst xmlns:a="http://schemas.openxmlformats.org/drawingml/2006/main">
               <a:ext uri="{FF2B5EF4-FFF2-40B4-BE49-F238E27FC236}">
-                <a16:creationId xmlns:a16="http://schemas.microsoft.com/office/drawing/2014/main" id="{383A7699-3809-4344-A74E-AA7471EA07E9}"/>
+                <a16:creationId xmlns:a16="http://schemas.microsoft.com/office/drawing/2014/main" id="{6497AD02-31B8-487D-9A09-FFFC26CE0BD4}"/>
               </a:ext>
             </a:extLst>
           </p:cNvPr>
@@ -13249,7 +13449,7 @@
           <p:cNvPr id="5" name="">
             <a:extLst xmlns:a="http://schemas.openxmlformats.org/drawingml/2006/main">
               <a:ext uri="{FF2B5EF4-FFF2-40B4-BE49-F238E27FC236}">
-                <a16:creationId xmlns:a16="http://schemas.microsoft.com/office/drawing/2014/main" id="{798D46B4-5EAA-4FE4-9497-F87E3E81B3C0}"/>
+                <a16:creationId xmlns:a16="http://schemas.microsoft.com/office/drawing/2014/main" id="{8E98E4E2-7C93-48AE-B48D-459CD4A5AED9}"/>
               </a:ext>
             </a:extLst>
           </p:cNvPr>
@@ -13306,7 +13506,7 @@
           <p:cNvPr id="6" name="">
             <a:extLst xmlns:a="http://schemas.openxmlformats.org/drawingml/2006/main">
               <a:ext uri="{FF2B5EF4-FFF2-40B4-BE49-F238E27FC236}">
-                <a16:creationId xmlns:a16="http://schemas.microsoft.com/office/drawing/2014/main" id="{F2DB046B-63DB-479F-A701-5AFE3F0ED8C2}"/>
+                <a16:creationId xmlns:a16="http://schemas.microsoft.com/office/drawing/2014/main" id="{32B37B7D-5641-453D-B4E4-55037C2AD10D}"/>
               </a:ext>
             </a:extLst>
           </p:cNvPr>
@@ -13363,7 +13563,7 @@
           <p:cNvPr id="7" name="">
             <a:extLst xmlns:a="http://schemas.openxmlformats.org/drawingml/2006/main">
               <a:ext uri="{FF2B5EF4-FFF2-40B4-BE49-F238E27FC236}">
-                <a16:creationId xmlns:a16="http://schemas.microsoft.com/office/drawing/2014/main" id="{4683CA96-FB5A-47F1-9B76-DE13FA298310}"/>
+                <a16:creationId xmlns:a16="http://schemas.microsoft.com/office/drawing/2014/main" id="{8CD94A2E-49BD-466B-89B3-8216B53C0A46}"/>
               </a:ext>
             </a:extLst>
           </p:cNvPr>
@@ -13395,7 +13595,7 @@
           <p:cNvPr id="8" name="">
             <a:extLst xmlns:a="http://schemas.openxmlformats.org/drawingml/2006/main">
               <a:ext uri="{FF2B5EF4-FFF2-40B4-BE49-F238E27FC236}">
-                <a16:creationId xmlns:a16="http://schemas.microsoft.com/office/drawing/2014/main" id="{7F6B7FD0-FA22-4053-BA9C-D66810C2485E}"/>
+                <a16:creationId xmlns:a16="http://schemas.microsoft.com/office/drawing/2014/main" id="{F3BC879F-B53E-4D8F-98FF-AB19D55E339D}"/>
               </a:ext>
             </a:extLst>
           </p:cNvPr>
@@ -13452,7 +13652,7 @@
           <p:cNvPr id="9" name="">
             <a:extLst xmlns:a="http://schemas.openxmlformats.org/drawingml/2006/main">
               <a:ext uri="{FF2B5EF4-FFF2-40B4-BE49-F238E27FC236}">
-                <a16:creationId xmlns:a16="http://schemas.microsoft.com/office/drawing/2014/main" id="{24EEE287-F83D-4073-9211-E73E1ADBD5EA}"/>
+                <a16:creationId xmlns:a16="http://schemas.microsoft.com/office/drawing/2014/main" id="{9F1C591C-1A55-4803-9B21-0F7B09DB84D3}"/>
               </a:ext>
             </a:extLst>
           </p:cNvPr>
@@ -13509,7 +13709,7 @@
           <p:cNvPr id="10" name="">
             <a:extLst xmlns:a="http://schemas.openxmlformats.org/drawingml/2006/main">
               <a:ext uri="{FF2B5EF4-FFF2-40B4-BE49-F238E27FC236}">
-                <a16:creationId xmlns:a16="http://schemas.microsoft.com/office/drawing/2014/main" id="{AD137678-FABE-4D19-AE52-BC3E30572A7E}"/>
+                <a16:creationId xmlns:a16="http://schemas.microsoft.com/office/drawing/2014/main" id="{C82494A8-E102-4BC3-98B1-2DCBB1854BBF}"/>
               </a:ext>
             </a:extLst>
           </p:cNvPr>
@@ -13543,7 +13743,7 @@
           <p:cNvPr id="11" name="">
             <a:extLst xmlns:a="http://schemas.openxmlformats.org/drawingml/2006/main">
               <a:ext uri="{FF2B5EF4-FFF2-40B4-BE49-F238E27FC236}">
-                <a16:creationId xmlns:a16="http://schemas.microsoft.com/office/drawing/2014/main" id="{D676B319-B981-4DEA-84CE-D7D2F0E0177C}"/>
+                <a16:creationId xmlns:a16="http://schemas.microsoft.com/office/drawing/2014/main" id="{DE4E01BC-6A6C-41DC-BED1-FCA6DC8A89E2}"/>
               </a:ext>
             </a:extLst>
           </p:cNvPr>
@@ -13575,7 +13775,7 @@
           <p:cNvPr id="12" name="">
             <a:extLst xmlns:a="http://schemas.openxmlformats.org/drawingml/2006/main">
               <a:ext uri="{FF2B5EF4-FFF2-40B4-BE49-F238E27FC236}">
-                <a16:creationId xmlns:a16="http://schemas.microsoft.com/office/drawing/2014/main" id="{287AE25A-C27F-4699-8D48-2EF3475B2468}"/>
+                <a16:creationId xmlns:a16="http://schemas.microsoft.com/office/drawing/2014/main" id="{5C53E2FF-F02E-4806-BF0B-70BD82F10C64}"/>
               </a:ext>
             </a:extLst>
           </p:cNvPr>
@@ -13632,7 +13832,7 @@
           <p:cNvPr id="13" name="">
             <a:extLst xmlns:a="http://schemas.openxmlformats.org/drawingml/2006/main">
               <a:ext uri="{FF2B5EF4-FFF2-40B4-BE49-F238E27FC236}">
-                <a16:creationId xmlns:a16="http://schemas.microsoft.com/office/drawing/2014/main" id="{0C1800EE-D406-49C8-8D17-798DB57A407B}"/>
+                <a16:creationId xmlns:a16="http://schemas.microsoft.com/office/drawing/2014/main" id="{45AD4B62-8329-4FB5-A7CE-E8645D3FCF1E}"/>
               </a:ext>
             </a:extLst>
           </p:cNvPr>
@@ -13689,7 +13889,7 @@
           <p:cNvPr id="14" name="">
             <a:extLst xmlns:a="http://schemas.openxmlformats.org/drawingml/2006/main">
               <a:ext uri="{FF2B5EF4-FFF2-40B4-BE49-F238E27FC236}">
-                <a16:creationId xmlns:a16="http://schemas.microsoft.com/office/drawing/2014/main" id="{B1658CB7-350E-483E-A4BE-0693D0006414}"/>
+                <a16:creationId xmlns:a16="http://schemas.microsoft.com/office/drawing/2014/main" id="{881B7968-02B0-4318-87D0-A2FE3DCE2B76}"/>
               </a:ext>
             </a:extLst>
           </p:cNvPr>
@@ -13723,7 +13923,7 @@
           <p:cNvPr id="15" name="">
             <a:extLst xmlns:a="http://schemas.openxmlformats.org/drawingml/2006/main">
               <a:ext uri="{FF2B5EF4-FFF2-40B4-BE49-F238E27FC236}">
-                <a16:creationId xmlns:a16="http://schemas.microsoft.com/office/drawing/2014/main" id="{374E1884-6EAB-47CA-BD62-3EC1D8F8086C}"/>
+                <a16:creationId xmlns:a16="http://schemas.microsoft.com/office/drawing/2014/main" id="{3611BEB9-8B10-4519-8928-BC88FD82D4C7}"/>
               </a:ext>
             </a:extLst>
           </p:cNvPr>
@@ -13755,7 +13955,7 @@
           <p:cNvPr id="16" name="">
             <a:extLst xmlns:a="http://schemas.openxmlformats.org/drawingml/2006/main">
               <a:ext uri="{FF2B5EF4-FFF2-40B4-BE49-F238E27FC236}">
-                <a16:creationId xmlns:a16="http://schemas.microsoft.com/office/drawing/2014/main" id="{EFAF1A80-A014-440E-A419-CF68976A4FE7}"/>
+                <a16:creationId xmlns:a16="http://schemas.microsoft.com/office/drawing/2014/main" id="{D6A74DE5-7D2F-4B59-B3B4-2B74EA2FDEB6}"/>
               </a:ext>
             </a:extLst>
           </p:cNvPr>
@@ -13812,7 +14012,7 @@
           <p:cNvPr id="17" name="">
             <a:extLst xmlns:a="http://schemas.openxmlformats.org/drawingml/2006/main">
               <a:ext uri="{FF2B5EF4-FFF2-40B4-BE49-F238E27FC236}">
-                <a16:creationId xmlns:a16="http://schemas.microsoft.com/office/drawing/2014/main" id="{6531698C-6EE5-4280-BD3B-C99786B27AC1}"/>
+                <a16:creationId xmlns:a16="http://schemas.microsoft.com/office/drawing/2014/main" id="{8542F6FA-C12D-4479-85D7-77BA3E814958}"/>
               </a:ext>
             </a:extLst>
           </p:cNvPr>
@@ -13869,7 +14069,7 @@
           <p:cNvPr id="18" name="">
             <a:extLst xmlns:a="http://schemas.openxmlformats.org/drawingml/2006/main">
               <a:ext uri="{FF2B5EF4-FFF2-40B4-BE49-F238E27FC236}">
-                <a16:creationId xmlns:a16="http://schemas.microsoft.com/office/drawing/2014/main" id="{ECDB205B-27FC-43B3-80F7-500A0710EB5F}"/>
+                <a16:creationId xmlns:a16="http://schemas.microsoft.com/office/drawing/2014/main" id="{51B2A298-14CA-4B50-9769-EBE07F490EC4}"/>
               </a:ext>
             </a:extLst>
           </p:cNvPr>
@@ -13903,7 +14103,7 @@
           <p:cNvPr id="19" name="">
             <a:extLst xmlns:a="http://schemas.openxmlformats.org/drawingml/2006/main">
               <a:ext uri="{FF2B5EF4-FFF2-40B4-BE49-F238E27FC236}">
-                <a16:creationId xmlns:a16="http://schemas.microsoft.com/office/drawing/2014/main" id="{28A28A07-D4FE-4AB9-9C77-1508D3F8CBBC}"/>
+                <a16:creationId xmlns:a16="http://schemas.microsoft.com/office/drawing/2014/main" id="{B22A8E0A-A748-4932-8A9C-0CE49E94310A}"/>
               </a:ext>
             </a:extLst>
           </p:cNvPr>
@@ -13935,7 +14135,7 @@
           <p:cNvPr id="20" name="">
             <a:extLst xmlns:a="http://schemas.openxmlformats.org/drawingml/2006/main">
               <a:ext uri="{FF2B5EF4-FFF2-40B4-BE49-F238E27FC236}">
-                <a16:creationId xmlns:a16="http://schemas.microsoft.com/office/drawing/2014/main" id="{95DAFAA0-5FAC-48DE-8F20-B0BEC47A399C}"/>
+                <a16:creationId xmlns:a16="http://schemas.microsoft.com/office/drawing/2014/main" id="{929BA884-30FE-4F9D-8CC7-9D207851B9C3}"/>
               </a:ext>
             </a:extLst>
           </p:cNvPr>
@@ -13992,7 +14192,7 @@
           <p:cNvPr id="21" name="">
             <a:extLst xmlns:a="http://schemas.openxmlformats.org/drawingml/2006/main">
               <a:ext uri="{FF2B5EF4-FFF2-40B4-BE49-F238E27FC236}">
-                <a16:creationId xmlns:a16="http://schemas.microsoft.com/office/drawing/2014/main" id="{B3AE4CFA-1064-4EBD-B28E-242C0453CB30}"/>
+                <a16:creationId xmlns:a16="http://schemas.microsoft.com/office/drawing/2014/main" id="{1CA5BE15-622B-4BA4-900F-94F173F25B32}"/>
               </a:ext>
             </a:extLst>
           </p:cNvPr>
@@ -14047,7 +14247,7 @@
     </p:spTree>
     <p:extLst>
       <p:ext uri="{BB962C8B-B14F-4D97-AF65-F5344CB8AC3E}">
-        <p14:creationId xmlns:p14="http://schemas.microsoft.com/office/powerpoint/2010/main" val="531986882"/>
+        <p14:creationId xmlns:p14="http://schemas.microsoft.com/office/powerpoint/2010/main" val="810383334"/>
       </p:ext>
     </p:extLst>
   </p:cSld>
